--- a/chapter4/chapter4.pptx
+++ b/chapter4/chapter4.pptx
@@ -9651,10 +9651,12 @@
           </a:bodyPr>
           <a:lstStyle/>
           <a:p>
-            <a:pPr>
-              <a:spcAft>
-                <a:spcPts val="1000"/>
-              </a:spcAft>
+            <a:pPr lvl="0" marL="457200" indent="-228600">
+              <a:buFont typeface="Calibri"/>
+              <a:spcAft>
+                <a:spcPts val="1000"/>
+              </a:spcAft>
+              <a:buSzPct val="100000"/>
               <a:buChar char="•"/>
               <a:lnSpc>
                 <a:spcPts val="2200"/>
@@ -9671,10 +9673,12 @@
             </a:r>
           </a:p>
           <a:p>
-            <a:pPr>
-              <a:spcAft>
-                <a:spcPts val="1000"/>
-              </a:spcAft>
+            <a:pPr lvl="0" marL="457200" indent="-228600">
+              <a:buFont typeface="Calibri"/>
+              <a:spcAft>
+                <a:spcPts val="1000"/>
+              </a:spcAft>
+              <a:buSzPct val="100000"/>
               <a:buChar char="•"/>
               <a:lnSpc>
                 <a:spcPts val="2200"/>
@@ -9810,10 +9814,12 @@
           </a:bodyPr>
           <a:lstStyle/>
           <a:p>
-            <a:pPr>
-              <a:spcAft>
-                <a:spcPts val="1000"/>
-              </a:spcAft>
+            <a:pPr lvl="0" marL="457200" indent="-228600">
+              <a:buFont typeface="Calibri"/>
+              <a:spcAft>
+                <a:spcPts val="1000"/>
+              </a:spcAft>
+              <a:buSzPct val="100000"/>
               <a:buChar char="•"/>
               <a:lnSpc>
                 <a:spcPts val="2200"/>
@@ -9830,10 +9836,12 @@
             </a:r>
           </a:p>
           <a:p>
-            <a:pPr>
-              <a:spcAft>
-                <a:spcPts val="1000"/>
-              </a:spcAft>
+            <a:pPr lvl="0" marL="457200" indent="-228600">
+              <a:buFont typeface="Calibri"/>
+              <a:spcAft>
+                <a:spcPts val="1000"/>
+              </a:spcAft>
+              <a:buSzPct val="100000"/>
               <a:buChar char="•"/>
               <a:lnSpc>
                 <a:spcPts val="2200"/>
@@ -9850,10 +9858,12 @@
             </a:r>
           </a:p>
           <a:p>
-            <a:pPr>
-              <a:spcAft>
-                <a:spcPts val="1000"/>
-              </a:spcAft>
+            <a:pPr lvl="0" marL="457200" indent="-228600">
+              <a:buFont typeface="Calibri"/>
+              <a:spcAft>
+                <a:spcPts val="1000"/>
+              </a:spcAft>
+              <a:buSzPct val="100000"/>
               <a:buChar char="•"/>
               <a:lnSpc>
                 <a:spcPts val="2200"/>
@@ -9989,10 +9999,12 @@
           </a:bodyPr>
           <a:lstStyle/>
           <a:p>
-            <a:pPr>
-              <a:spcAft>
-                <a:spcPts val="1000"/>
-              </a:spcAft>
+            <a:pPr lvl="0" marL="457200" indent="-228600">
+              <a:buFont typeface="Calibri"/>
+              <a:spcAft>
+                <a:spcPts val="1000"/>
+              </a:spcAft>
+              <a:buSzPct val="100000"/>
               <a:buChar char="•"/>
               <a:lnSpc>
                 <a:spcPts val="2200"/>
@@ -10009,10 +10021,12 @@
             </a:r>
           </a:p>
           <a:p>
-            <a:pPr>
-              <a:spcAft>
-                <a:spcPts val="1000"/>
-              </a:spcAft>
+            <a:pPr lvl="0" marL="457200" indent="-228600">
+              <a:buFont typeface="Calibri"/>
+              <a:spcAft>
+                <a:spcPts val="1000"/>
+              </a:spcAft>
+              <a:buSzPct val="100000"/>
               <a:buChar char="•"/>
               <a:lnSpc>
                 <a:spcPts val="2200"/>
@@ -10029,10 +10043,12 @@
             </a:r>
           </a:p>
           <a:p>
-            <a:pPr>
-              <a:spcAft>
-                <a:spcPts val="1000"/>
-              </a:spcAft>
+            <a:pPr lvl="0" marL="457200" indent="-228600">
+              <a:buFont typeface="Calibri"/>
+              <a:spcAft>
+                <a:spcPts val="1000"/>
+              </a:spcAft>
+              <a:buSzPct val="100000"/>
               <a:buChar char="•"/>
               <a:lnSpc>
                 <a:spcPts val="2200"/>
@@ -10049,10 +10065,12 @@
             </a:r>
           </a:p>
           <a:p>
-            <a:pPr>
-              <a:spcAft>
-                <a:spcPts val="1000"/>
-              </a:spcAft>
+            <a:pPr lvl="0" marL="457200" indent="-228600">
+              <a:buFont typeface="Calibri"/>
+              <a:spcAft>
+                <a:spcPts val="1000"/>
+              </a:spcAft>
+              <a:buSzPct val="100000"/>
               <a:buChar char="•"/>
               <a:lnSpc>
                 <a:spcPts val="2200"/>
@@ -10069,10 +10087,12 @@
             </a:r>
           </a:p>
           <a:p>
-            <a:pPr>
-              <a:spcAft>
-                <a:spcPts val="1000"/>
-              </a:spcAft>
+            <a:pPr lvl="0" marL="457200" indent="-228600">
+              <a:buFont typeface="Calibri"/>
+              <a:spcAft>
+                <a:spcPts val="1000"/>
+              </a:spcAft>
+              <a:buSzPct val="100000"/>
               <a:buChar char="•"/>
               <a:lnSpc>
                 <a:spcPts val="2200"/>
@@ -10089,10 +10109,12 @@
             </a:r>
           </a:p>
           <a:p>
-            <a:pPr>
-              <a:spcAft>
-                <a:spcPts val="1000"/>
-              </a:spcAft>
+            <a:pPr lvl="0" marL="457200" indent="-228600">
+              <a:buFont typeface="Calibri"/>
+              <a:spcAft>
+                <a:spcPts val="1000"/>
+              </a:spcAft>
+              <a:buSzPct val="100000"/>
               <a:buChar char="•"/>
               <a:lnSpc>
                 <a:spcPts val="2200"/>
@@ -10228,10 +10250,12 @@
           </a:bodyPr>
           <a:lstStyle/>
           <a:p>
-            <a:pPr>
-              <a:spcAft>
-                <a:spcPts val="1000"/>
-              </a:spcAft>
+            <a:pPr lvl="0" marL="457200" indent="-228600">
+              <a:buFont typeface="Calibri"/>
+              <a:spcAft>
+                <a:spcPts val="1000"/>
+              </a:spcAft>
+              <a:buSzPct val="100000"/>
               <a:buChar char="•"/>
               <a:lnSpc>
                 <a:spcPts val="2200"/>
@@ -10248,10 +10272,12 @@
             </a:r>
           </a:p>
           <a:p>
-            <a:pPr>
-              <a:spcAft>
-                <a:spcPts val="1000"/>
-              </a:spcAft>
+            <a:pPr lvl="0" marL="457200" indent="-228600">
+              <a:buFont typeface="Calibri"/>
+              <a:spcAft>
+                <a:spcPts val="1000"/>
+              </a:spcAft>
+              <a:buSzPct val="100000"/>
               <a:buChar char="•"/>
               <a:lnSpc>
                 <a:spcPts val="2200"/>
@@ -10268,10 +10294,12 @@
             </a:r>
           </a:p>
           <a:p>
-            <a:pPr>
-              <a:spcAft>
-                <a:spcPts val="1000"/>
-              </a:spcAft>
+            <a:pPr lvl="0" marL="457200" indent="-228600">
+              <a:buFont typeface="Calibri"/>
+              <a:spcAft>
+                <a:spcPts val="1000"/>
+              </a:spcAft>
+              <a:buSzPct val="100000"/>
               <a:buChar char="•"/>
               <a:lnSpc>
                 <a:spcPts val="2200"/>
@@ -10288,10 +10316,12 @@
             </a:r>
           </a:p>
           <a:p>
-            <a:pPr>
-              <a:spcAft>
-                <a:spcPts val="1000"/>
-              </a:spcAft>
+            <a:pPr lvl="0" marL="457200" indent="-228600">
+              <a:buFont typeface="Calibri"/>
+              <a:spcAft>
+                <a:spcPts val="1000"/>
+              </a:spcAft>
+              <a:buSzPct val="100000"/>
               <a:buChar char="•"/>
               <a:lnSpc>
                 <a:spcPts val="2200"/>
@@ -10308,10 +10338,12 @@
             </a:r>
           </a:p>
           <a:p>
-            <a:pPr>
-              <a:spcAft>
-                <a:spcPts val="1000"/>
-              </a:spcAft>
+            <a:pPr lvl="0" marL="457200" indent="-228600">
+              <a:buFont typeface="Calibri"/>
+              <a:spcAft>
+                <a:spcPts val="1000"/>
+              </a:spcAft>
+              <a:buSzPct val="100000"/>
               <a:buChar char="•"/>
               <a:lnSpc>
                 <a:spcPts val="2200"/>
@@ -10328,10 +10360,12 @@
             </a:r>
           </a:p>
           <a:p>
-            <a:pPr>
-              <a:spcAft>
-                <a:spcPts val="1000"/>
-              </a:spcAft>
+            <a:pPr lvl="0" marL="457200" indent="-228600">
+              <a:buFont typeface="Calibri"/>
+              <a:spcAft>
+                <a:spcPts val="1000"/>
+              </a:spcAft>
+              <a:buSzPct val="100000"/>
               <a:buChar char="•"/>
               <a:lnSpc>
                 <a:spcPts val="2200"/>
@@ -10467,10 +10501,12 @@
           </a:bodyPr>
           <a:lstStyle/>
           <a:p>
-            <a:pPr>
-              <a:spcAft>
-                <a:spcPts val="1000"/>
-              </a:spcAft>
+            <a:pPr lvl="0" marL="457200" indent="-228600">
+              <a:buFont typeface="Calibri"/>
+              <a:spcAft>
+                <a:spcPts val="1000"/>
+              </a:spcAft>
+              <a:buSzPct val="100000"/>
               <a:buChar char="•"/>
               <a:lnSpc>
                 <a:spcPts val="2200"/>
@@ -10487,10 +10523,12 @@
             </a:r>
           </a:p>
           <a:p>
-            <a:pPr>
-              <a:spcAft>
-                <a:spcPts val="1000"/>
-              </a:spcAft>
+            <a:pPr lvl="0" marL="457200" indent="-228600">
+              <a:buFont typeface="Calibri"/>
+              <a:spcAft>
+                <a:spcPts val="1000"/>
+              </a:spcAft>
+              <a:buSzPct val="100000"/>
               <a:buChar char="•"/>
               <a:lnSpc>
                 <a:spcPts val="2200"/>
@@ -10507,10 +10545,12 @@
             </a:r>
           </a:p>
           <a:p>
-            <a:pPr>
-              <a:spcAft>
-                <a:spcPts val="1000"/>
-              </a:spcAft>
+            <a:pPr lvl="0" marL="457200" indent="-228600">
+              <a:buFont typeface="Calibri"/>
+              <a:spcAft>
+                <a:spcPts val="1000"/>
+              </a:spcAft>
+              <a:buSzPct val="100000"/>
               <a:buChar char="•"/>
               <a:lnSpc>
                 <a:spcPts val="2200"/>
@@ -10527,10 +10567,12 @@
             </a:r>
           </a:p>
           <a:p>
-            <a:pPr>
-              <a:spcAft>
-                <a:spcPts val="1000"/>
-              </a:spcAft>
+            <a:pPr lvl="0" marL="457200" indent="-228600">
+              <a:buFont typeface="Calibri"/>
+              <a:spcAft>
+                <a:spcPts val="1000"/>
+              </a:spcAft>
+              <a:buSzPct val="100000"/>
               <a:buChar char="•"/>
               <a:lnSpc>
                 <a:spcPts val="2200"/>
@@ -10547,10 +10589,12 @@
             </a:r>
           </a:p>
           <a:p>
-            <a:pPr>
-              <a:spcAft>
-                <a:spcPts val="1000"/>
-              </a:spcAft>
+            <a:pPr lvl="0" marL="457200" indent="-228600">
+              <a:buFont typeface="Calibri"/>
+              <a:spcAft>
+                <a:spcPts val="1000"/>
+              </a:spcAft>
+              <a:buSzPct val="100000"/>
               <a:buChar char="•"/>
               <a:lnSpc>
                 <a:spcPts val="2200"/>
@@ -10567,10 +10611,12 @@
             </a:r>
           </a:p>
           <a:p>
-            <a:pPr>
-              <a:spcAft>
-                <a:spcPts val="1000"/>
-              </a:spcAft>
+            <a:pPr lvl="0" marL="457200" indent="-228600">
+              <a:buFont typeface="Calibri"/>
+              <a:spcAft>
+                <a:spcPts val="1000"/>
+              </a:spcAft>
+              <a:buSzPct val="100000"/>
               <a:buChar char="•"/>
               <a:lnSpc>
                 <a:spcPts val="2200"/>
@@ -10706,10 +10752,12 @@
           </a:bodyPr>
           <a:lstStyle/>
           <a:p>
-            <a:pPr>
-              <a:spcAft>
-                <a:spcPts val="1000"/>
-              </a:spcAft>
+            <a:pPr lvl="0" marL="457200" indent="-228600">
+              <a:buFont typeface="Calibri"/>
+              <a:spcAft>
+                <a:spcPts val="1000"/>
+              </a:spcAft>
+              <a:buSzPct val="100000"/>
               <a:buChar char="•"/>
               <a:lnSpc>
                 <a:spcPts val="2200"/>
@@ -10726,10 +10774,12 @@
             </a:r>
           </a:p>
           <a:p>
-            <a:pPr>
-              <a:spcAft>
-                <a:spcPts val="1000"/>
-              </a:spcAft>
+            <a:pPr lvl="0" marL="457200" indent="-228600">
+              <a:buFont typeface="Calibri"/>
+              <a:spcAft>
+                <a:spcPts val="1000"/>
+              </a:spcAft>
+              <a:buSzPct val="100000"/>
               <a:buChar char="•"/>
               <a:lnSpc>
                 <a:spcPts val="2200"/>
@@ -10746,10 +10796,12 @@
             </a:r>
           </a:p>
           <a:p>
-            <a:pPr>
-              <a:spcAft>
-                <a:spcPts val="1000"/>
-              </a:spcAft>
+            <a:pPr lvl="0" marL="457200" indent="-228600">
+              <a:buFont typeface="Calibri"/>
+              <a:spcAft>
+                <a:spcPts val="1000"/>
+              </a:spcAft>
+              <a:buSzPct val="100000"/>
               <a:buChar char="•"/>
               <a:lnSpc>
                 <a:spcPts val="2200"/>
@@ -10766,10 +10818,12 @@
             </a:r>
           </a:p>
           <a:p>
-            <a:pPr>
-              <a:spcAft>
-                <a:spcPts val="1000"/>
-              </a:spcAft>
+            <a:pPr lvl="0" marL="457200" indent="-228600">
+              <a:buFont typeface="Calibri"/>
+              <a:spcAft>
+                <a:spcPts val="1000"/>
+              </a:spcAft>
+              <a:buSzPct val="100000"/>
               <a:buChar char="•"/>
               <a:lnSpc>
                 <a:spcPts val="2200"/>
@@ -10786,10 +10840,12 @@
             </a:r>
           </a:p>
           <a:p>
-            <a:pPr>
-              <a:spcAft>
-                <a:spcPts val="1000"/>
-              </a:spcAft>
+            <a:pPr lvl="0" marL="457200" indent="-228600">
+              <a:buFont typeface="Calibri"/>
+              <a:spcAft>
+                <a:spcPts val="1000"/>
+              </a:spcAft>
+              <a:buSzPct val="100000"/>
               <a:buChar char="•"/>
               <a:lnSpc>
                 <a:spcPts val="2200"/>
@@ -10925,10 +10981,12 @@
           </a:bodyPr>
           <a:lstStyle/>
           <a:p>
-            <a:pPr>
-              <a:spcAft>
-                <a:spcPts val="1000"/>
-              </a:spcAft>
+            <a:pPr lvl="0" marL="457200" indent="-228600">
+              <a:buFont typeface="Calibri"/>
+              <a:spcAft>
+                <a:spcPts val="1000"/>
+              </a:spcAft>
+              <a:buSzPct val="100000"/>
               <a:buChar char="•"/>
               <a:lnSpc>
                 <a:spcPts val="2200"/>
@@ -10945,10 +11003,12 @@
             </a:r>
           </a:p>
           <a:p>
-            <a:pPr>
-              <a:spcAft>
-                <a:spcPts val="1000"/>
-              </a:spcAft>
+            <a:pPr lvl="0" marL="457200" indent="-228600">
+              <a:buFont typeface="Calibri"/>
+              <a:spcAft>
+                <a:spcPts val="1000"/>
+              </a:spcAft>
+              <a:buSzPct val="100000"/>
               <a:buChar char="•"/>
               <a:lnSpc>
                 <a:spcPts val="2200"/>
@@ -10965,10 +11025,12 @@
             </a:r>
           </a:p>
           <a:p>
-            <a:pPr>
-              <a:spcAft>
-                <a:spcPts val="1000"/>
-              </a:spcAft>
+            <a:pPr lvl="0" marL="457200" indent="-228600">
+              <a:buFont typeface="Calibri"/>
+              <a:spcAft>
+                <a:spcPts val="1000"/>
+              </a:spcAft>
+              <a:buSzPct val="100000"/>
               <a:buChar char="•"/>
               <a:lnSpc>
                 <a:spcPts val="2200"/>
@@ -10985,10 +11047,12 @@
             </a:r>
           </a:p>
           <a:p>
-            <a:pPr>
-              <a:spcAft>
-                <a:spcPts val="1000"/>
-              </a:spcAft>
+            <a:pPr lvl="0" marL="457200" indent="-228600">
+              <a:buFont typeface="Calibri"/>
+              <a:spcAft>
+                <a:spcPts val="1000"/>
+              </a:spcAft>
+              <a:buSzPct val="100000"/>
               <a:buChar char="•"/>
               <a:lnSpc>
                 <a:spcPts val="2200"/>
@@ -11005,10 +11069,12 @@
             </a:r>
           </a:p>
           <a:p>
-            <a:pPr>
-              <a:spcAft>
-                <a:spcPts val="1000"/>
-              </a:spcAft>
+            <a:pPr lvl="0" marL="457200" indent="-228600">
+              <a:buFont typeface="Calibri"/>
+              <a:spcAft>
+                <a:spcPts val="1000"/>
+              </a:spcAft>
+              <a:buSzPct val="100000"/>
               <a:buChar char="•"/>
               <a:lnSpc>
                 <a:spcPts val="2200"/>
@@ -11025,10 +11091,12 @@
             </a:r>
           </a:p>
           <a:p>
-            <a:pPr>
-              <a:spcAft>
-                <a:spcPts val="1000"/>
-              </a:spcAft>
+            <a:pPr lvl="0" marL="457200" indent="-228600">
+              <a:buFont typeface="Calibri"/>
+              <a:spcAft>
+                <a:spcPts val="1000"/>
+              </a:spcAft>
+              <a:buSzPct val="100000"/>
               <a:buChar char="•"/>
               <a:lnSpc>
                 <a:spcPts val="2200"/>
@@ -11164,10 +11232,12 @@
           </a:bodyPr>
           <a:lstStyle/>
           <a:p>
-            <a:pPr>
-              <a:spcAft>
-                <a:spcPts val="1000"/>
-              </a:spcAft>
+            <a:pPr lvl="0" marL="457200" indent="-228600">
+              <a:buFont typeface="Calibri"/>
+              <a:spcAft>
+                <a:spcPts val="1000"/>
+              </a:spcAft>
+              <a:buSzPct val="100000"/>
               <a:buChar char="•"/>
               <a:lnSpc>
                 <a:spcPts val="2200"/>
@@ -11184,10 +11254,12 @@
             </a:r>
           </a:p>
           <a:p>
-            <a:pPr>
-              <a:spcAft>
-                <a:spcPts val="1000"/>
-              </a:spcAft>
+            <a:pPr lvl="0" marL="457200" indent="-228600">
+              <a:buFont typeface="Calibri"/>
+              <a:spcAft>
+                <a:spcPts val="1000"/>
+              </a:spcAft>
+              <a:buSzPct val="100000"/>
               <a:buChar char="•"/>
               <a:lnSpc>
                 <a:spcPts val="2200"/>
@@ -11204,10 +11276,12 @@
             </a:r>
           </a:p>
           <a:p>
-            <a:pPr>
-              <a:spcAft>
-                <a:spcPts val="1000"/>
-              </a:spcAft>
+            <a:pPr lvl="0" marL="457200" indent="-228600">
+              <a:buFont typeface="Calibri"/>
+              <a:spcAft>
+                <a:spcPts val="1000"/>
+              </a:spcAft>
+              <a:buSzPct val="100000"/>
               <a:buChar char="•"/>
               <a:lnSpc>
                 <a:spcPts val="2200"/>
@@ -11224,10 +11298,12 @@
             </a:r>
           </a:p>
           <a:p>
-            <a:pPr>
-              <a:spcAft>
-                <a:spcPts val="1000"/>
-              </a:spcAft>
+            <a:pPr lvl="0" marL="457200" indent="-228600">
+              <a:buFont typeface="Calibri"/>
+              <a:spcAft>
+                <a:spcPts val="1000"/>
+              </a:spcAft>
+              <a:buSzPct val="100000"/>
               <a:buChar char="•"/>
               <a:lnSpc>
                 <a:spcPts val="2200"/>
@@ -11244,10 +11320,12 @@
             </a:r>
           </a:p>
           <a:p>
-            <a:pPr>
-              <a:spcAft>
-                <a:spcPts val="1000"/>
-              </a:spcAft>
+            <a:pPr lvl="0" marL="457200" indent="-228600">
+              <a:buFont typeface="Calibri"/>
+              <a:spcAft>
+                <a:spcPts val="1000"/>
+              </a:spcAft>
+              <a:buSzPct val="100000"/>
               <a:buChar char="•"/>
               <a:lnSpc>
                 <a:spcPts val="2200"/>
@@ -11264,10 +11342,12 @@
             </a:r>
           </a:p>
           <a:p>
-            <a:pPr>
-              <a:spcAft>
-                <a:spcPts val="1000"/>
-              </a:spcAft>
+            <a:pPr lvl="0" marL="457200" indent="-228600">
+              <a:buFont typeface="Calibri"/>
+              <a:spcAft>
+                <a:spcPts val="1000"/>
+              </a:spcAft>
+              <a:buSzPct val="100000"/>
               <a:buChar char="•"/>
               <a:lnSpc>
                 <a:spcPts val="2200"/>
@@ -11403,10 +11483,12 @@
           </a:bodyPr>
           <a:lstStyle/>
           <a:p>
-            <a:pPr>
-              <a:spcAft>
-                <a:spcPts val="1000"/>
-              </a:spcAft>
+            <a:pPr lvl="0" marL="457200" indent="-228600">
+              <a:buFont typeface="Calibri"/>
+              <a:spcAft>
+                <a:spcPts val="1000"/>
+              </a:spcAft>
+              <a:buSzPct val="100000"/>
               <a:buChar char="•"/>
               <a:lnSpc>
                 <a:spcPts val="2200"/>
@@ -11423,10 +11505,12 @@
             </a:r>
           </a:p>
           <a:p>
-            <a:pPr>
-              <a:spcAft>
-                <a:spcPts val="1000"/>
-              </a:spcAft>
+            <a:pPr lvl="0" marL="457200" indent="-228600">
+              <a:buFont typeface="Calibri"/>
+              <a:spcAft>
+                <a:spcPts val="1000"/>
+              </a:spcAft>
+              <a:buSzPct val="100000"/>
               <a:buChar char="•"/>
               <a:lnSpc>
                 <a:spcPts val="2200"/>
@@ -11443,10 +11527,12 @@
             </a:r>
           </a:p>
           <a:p>
-            <a:pPr>
-              <a:spcAft>
-                <a:spcPts val="1000"/>
-              </a:spcAft>
+            <a:pPr lvl="0" marL="457200" indent="-228600">
+              <a:buFont typeface="Calibri"/>
+              <a:spcAft>
+                <a:spcPts val="1000"/>
+              </a:spcAft>
+              <a:buSzPct val="100000"/>
               <a:buChar char="•"/>
               <a:lnSpc>
                 <a:spcPts val="2200"/>
@@ -11582,10 +11668,12 @@
           </a:bodyPr>
           <a:lstStyle/>
           <a:p>
-            <a:pPr>
-              <a:spcAft>
-                <a:spcPts val="1000"/>
-              </a:spcAft>
+            <a:pPr lvl="0" marL="457200" indent="-228600">
+              <a:buFont typeface="Calibri"/>
+              <a:spcAft>
+                <a:spcPts val="1000"/>
+              </a:spcAft>
+              <a:buSzPct val="100000"/>
               <a:buChar char="•"/>
               <a:lnSpc>
                 <a:spcPts val="2200"/>
@@ -11602,10 +11690,12 @@
             </a:r>
           </a:p>
           <a:p>
-            <a:pPr>
-              <a:spcAft>
-                <a:spcPts val="1000"/>
-              </a:spcAft>
+            <a:pPr lvl="0" marL="457200" indent="-228600">
+              <a:buFont typeface="Calibri"/>
+              <a:spcAft>
+                <a:spcPts val="1000"/>
+              </a:spcAft>
+              <a:buSzPct val="100000"/>
               <a:buChar char="•"/>
               <a:lnSpc>
                 <a:spcPts val="2200"/>
@@ -11741,10 +11831,12 @@
           </a:bodyPr>
           <a:lstStyle/>
           <a:p>
-            <a:pPr>
-              <a:spcAft>
-                <a:spcPts val="1000"/>
-              </a:spcAft>
+            <a:pPr lvl="0" marL="457200" indent="-228600">
+              <a:buFont typeface="Calibri"/>
+              <a:spcAft>
+                <a:spcPts val="1000"/>
+              </a:spcAft>
+              <a:buSzPct val="100000"/>
               <a:buChar char="•"/>
               <a:lnSpc>
                 <a:spcPts val="2200"/>
@@ -11761,10 +11853,12 @@
             </a:r>
           </a:p>
           <a:p>
-            <a:pPr>
-              <a:spcAft>
-                <a:spcPts val="1000"/>
-              </a:spcAft>
+            <a:pPr lvl="0" marL="457200" indent="-228600">
+              <a:buFont typeface="Calibri"/>
+              <a:spcAft>
+                <a:spcPts val="1000"/>
+              </a:spcAft>
+              <a:buSzPct val="100000"/>
               <a:buChar char="•"/>
               <a:lnSpc>
                 <a:spcPts val="2200"/>
@@ -11781,10 +11875,12 @@
             </a:r>
           </a:p>
           <a:p>
-            <a:pPr>
-              <a:spcAft>
-                <a:spcPts val="1000"/>
-              </a:spcAft>
+            <a:pPr lvl="0" marL="457200" indent="-228600">
+              <a:buFont typeface="Calibri"/>
+              <a:spcAft>
+                <a:spcPts val="1000"/>
+              </a:spcAft>
+              <a:buSzPct val="100000"/>
               <a:buChar char="•"/>
               <a:lnSpc>
                 <a:spcPts val="2200"/>
@@ -11920,10 +12016,12 @@
           </a:bodyPr>
           <a:lstStyle/>
           <a:p>
-            <a:pPr>
-              <a:spcAft>
-                <a:spcPts val="1000"/>
-              </a:spcAft>
+            <a:pPr lvl="0" marL="457200" indent="-228600">
+              <a:buFont typeface="Calibri"/>
+              <a:spcAft>
+                <a:spcPts val="1000"/>
+              </a:spcAft>
+              <a:buSzPct val="100000"/>
               <a:buChar char="•"/>
               <a:lnSpc>
                 <a:spcPts val="2200"/>
@@ -11940,10 +12038,12 @@
             </a:r>
           </a:p>
           <a:p>
-            <a:pPr>
-              <a:spcAft>
-                <a:spcPts val="1000"/>
-              </a:spcAft>
+            <a:pPr lvl="0" marL="457200" indent="-228600">
+              <a:buFont typeface="Calibri"/>
+              <a:spcAft>
+                <a:spcPts val="1000"/>
+              </a:spcAft>
+              <a:buSzPct val="100000"/>
               <a:buChar char="•"/>
               <a:lnSpc>
                 <a:spcPts val="2200"/>
@@ -12079,10 +12179,12 @@
           </a:bodyPr>
           <a:lstStyle/>
           <a:p>
-            <a:pPr>
-              <a:spcAft>
-                <a:spcPts val="1000"/>
-              </a:spcAft>
+            <a:pPr lvl="0" marL="457200" indent="-228600">
+              <a:buFont typeface="Calibri"/>
+              <a:spcAft>
+                <a:spcPts val="1000"/>
+              </a:spcAft>
+              <a:buSzPct val="100000"/>
               <a:buChar char="•"/>
               <a:lnSpc>
                 <a:spcPts val="2200"/>
@@ -12099,10 +12201,12 @@
             </a:r>
           </a:p>
           <a:p>
-            <a:pPr>
-              <a:spcAft>
-                <a:spcPts val="1000"/>
-              </a:spcAft>
+            <a:pPr lvl="0" marL="457200" indent="-228600">
+              <a:buFont typeface="Calibri"/>
+              <a:spcAft>
+                <a:spcPts val="1000"/>
+              </a:spcAft>
+              <a:buSzPct val="100000"/>
               <a:buChar char="•"/>
               <a:lnSpc>
                 <a:spcPts val="2200"/>
@@ -12119,10 +12223,12 @@
             </a:r>
           </a:p>
           <a:p>
-            <a:pPr>
-              <a:spcAft>
-                <a:spcPts val="1000"/>
-              </a:spcAft>
+            <a:pPr lvl="0" marL="457200" indent="-228600">
+              <a:buFont typeface="Calibri"/>
+              <a:spcAft>
+                <a:spcPts val="1000"/>
+              </a:spcAft>
+              <a:buSzPct val="100000"/>
               <a:buChar char="•"/>
               <a:lnSpc>
                 <a:spcPts val="2200"/>
@@ -12139,10 +12245,12 @@
             </a:r>
           </a:p>
           <a:p>
-            <a:pPr>
-              <a:spcAft>
-                <a:spcPts val="1000"/>
-              </a:spcAft>
+            <a:pPr lvl="0" marL="457200" indent="-228600">
+              <a:buFont typeface="Calibri"/>
+              <a:spcAft>
+                <a:spcPts val="1000"/>
+              </a:spcAft>
+              <a:buSzPct val="100000"/>
               <a:buChar char="•"/>
               <a:lnSpc>
                 <a:spcPts val="2200"/>
@@ -12159,10 +12267,12 @@
             </a:r>
           </a:p>
           <a:p>
-            <a:pPr>
-              <a:spcAft>
-                <a:spcPts val="1000"/>
-              </a:spcAft>
+            <a:pPr lvl="0" marL="457200" indent="-228600">
+              <a:buFont typeface="Calibri"/>
+              <a:spcAft>
+                <a:spcPts val="1000"/>
+              </a:spcAft>
+              <a:buSzPct val="100000"/>
               <a:buChar char="•"/>
               <a:lnSpc>
                 <a:spcPts val="2200"/>
@@ -12298,10 +12408,12 @@
           </a:bodyPr>
           <a:lstStyle/>
           <a:p>
-            <a:pPr>
-              <a:spcAft>
-                <a:spcPts val="1000"/>
-              </a:spcAft>
+            <a:pPr lvl="0" marL="457200" indent="-228600">
+              <a:buFont typeface="Calibri"/>
+              <a:spcAft>
+                <a:spcPts val="1000"/>
+              </a:spcAft>
+              <a:buSzPct val="100000"/>
               <a:buChar char="•"/>
               <a:lnSpc>
                 <a:spcPts val="2200"/>
@@ -12318,10 +12430,12 @@
             </a:r>
           </a:p>
           <a:p>
-            <a:pPr>
-              <a:spcAft>
-                <a:spcPts val="1000"/>
-              </a:spcAft>
+            <a:pPr lvl="0" marL="457200" indent="-228600">
+              <a:buFont typeface="Calibri"/>
+              <a:spcAft>
+                <a:spcPts val="1000"/>
+              </a:spcAft>
+              <a:buSzPct val="100000"/>
               <a:buChar char="•"/>
               <a:lnSpc>
                 <a:spcPts val="2200"/>
@@ -12338,10 +12452,12 @@
             </a:r>
           </a:p>
           <a:p>
-            <a:pPr>
-              <a:spcAft>
-                <a:spcPts val="1000"/>
-              </a:spcAft>
+            <a:pPr lvl="0" marL="457200" indent="-228600">
+              <a:buFont typeface="Calibri"/>
+              <a:spcAft>
+                <a:spcPts val="1000"/>
+              </a:spcAft>
+              <a:buSzPct val="100000"/>
               <a:buChar char="•"/>
               <a:lnSpc>
                 <a:spcPts val="2200"/>
@@ -12358,10 +12474,12 @@
             </a:r>
           </a:p>
           <a:p>
-            <a:pPr>
-              <a:spcAft>
-                <a:spcPts val="1000"/>
-              </a:spcAft>
+            <a:pPr lvl="0" marL="457200" indent="-228600">
+              <a:buFont typeface="Calibri"/>
+              <a:spcAft>
+                <a:spcPts val="1000"/>
+              </a:spcAft>
+              <a:buSzPct val="100000"/>
               <a:buChar char="•"/>
               <a:lnSpc>
                 <a:spcPts val="2200"/>
@@ -12378,10 +12496,12 @@
             </a:r>
           </a:p>
           <a:p>
-            <a:pPr>
-              <a:spcAft>
-                <a:spcPts val="1000"/>
-              </a:spcAft>
+            <a:pPr lvl="0" marL="457200" indent="-228600">
+              <a:buFont typeface="Calibri"/>
+              <a:spcAft>
+                <a:spcPts val="1000"/>
+              </a:spcAft>
+              <a:buSzPct val="100000"/>
               <a:buChar char="•"/>
               <a:lnSpc>
                 <a:spcPts val="2200"/>
@@ -12398,10 +12518,12 @@
             </a:r>
           </a:p>
           <a:p>
-            <a:pPr>
-              <a:spcAft>
-                <a:spcPts val="1000"/>
-              </a:spcAft>
+            <a:pPr lvl="0" marL="457200" indent="-228600">
+              <a:buFont typeface="Calibri"/>
+              <a:spcAft>
+                <a:spcPts val="1000"/>
+              </a:spcAft>
+              <a:buSzPct val="100000"/>
               <a:buChar char="•"/>
               <a:lnSpc>
                 <a:spcPts val="2200"/>
@@ -12537,10 +12659,12 @@
           </a:bodyPr>
           <a:lstStyle/>
           <a:p>
-            <a:pPr>
-              <a:spcAft>
-                <a:spcPts val="1000"/>
-              </a:spcAft>
+            <a:pPr lvl="0" marL="457200" indent="-228600">
+              <a:buFont typeface="Calibri"/>
+              <a:spcAft>
+                <a:spcPts val="1000"/>
+              </a:spcAft>
+              <a:buSzPct val="100000"/>
               <a:buChar char="•"/>
               <a:lnSpc>
                 <a:spcPts val="2200"/>
@@ -12557,10 +12681,12 @@
             </a:r>
           </a:p>
           <a:p>
-            <a:pPr>
-              <a:spcAft>
-                <a:spcPts val="1000"/>
-              </a:spcAft>
+            <a:pPr lvl="0" marL="457200" indent="-228600">
+              <a:buFont typeface="Calibri"/>
+              <a:spcAft>
+                <a:spcPts val="1000"/>
+              </a:spcAft>
+              <a:buSzPct val="100000"/>
               <a:buChar char="•"/>
               <a:lnSpc>
                 <a:spcPts val="2200"/>
@@ -12577,10 +12703,12 @@
             </a:r>
           </a:p>
           <a:p>
-            <a:pPr>
-              <a:spcAft>
-                <a:spcPts val="1000"/>
-              </a:spcAft>
+            <a:pPr lvl="0" marL="457200" indent="-228600">
+              <a:buFont typeface="Calibri"/>
+              <a:spcAft>
+                <a:spcPts val="1000"/>
+              </a:spcAft>
+              <a:buSzPct val="100000"/>
               <a:buChar char="•"/>
               <a:lnSpc>
                 <a:spcPts val="2200"/>
@@ -12597,10 +12725,12 @@
             </a:r>
           </a:p>
           <a:p>
-            <a:pPr>
-              <a:spcAft>
-                <a:spcPts val="1000"/>
-              </a:spcAft>
+            <a:pPr lvl="0" marL="457200" indent="-228600">
+              <a:buFont typeface="Calibri"/>
+              <a:spcAft>
+                <a:spcPts val="1000"/>
+              </a:spcAft>
+              <a:buSzPct val="100000"/>
               <a:buChar char="•"/>
               <a:lnSpc>
                 <a:spcPts val="2200"/>
@@ -12736,10 +12866,12 @@
           </a:bodyPr>
           <a:lstStyle/>
           <a:p>
-            <a:pPr>
-              <a:spcAft>
-                <a:spcPts val="1000"/>
-              </a:spcAft>
+            <a:pPr lvl="0" marL="457200" indent="-228600">
+              <a:buFont typeface="Calibri"/>
+              <a:spcAft>
+                <a:spcPts val="1000"/>
+              </a:spcAft>
+              <a:buSzPct val="100000"/>
               <a:buChar char="•"/>
               <a:lnSpc>
                 <a:spcPts val="2200"/>
@@ -12756,10 +12888,12 @@
             </a:r>
           </a:p>
           <a:p>
-            <a:pPr>
-              <a:spcAft>
-                <a:spcPts val="1000"/>
-              </a:spcAft>
+            <a:pPr lvl="0" marL="457200" indent="-228600">
+              <a:buFont typeface="Calibri"/>
+              <a:spcAft>
+                <a:spcPts val="1000"/>
+              </a:spcAft>
+              <a:buSzPct val="100000"/>
               <a:buChar char="•"/>
               <a:lnSpc>
                 <a:spcPts val="2200"/>
@@ -12776,10 +12910,12 @@
             </a:r>
           </a:p>
           <a:p>
-            <a:pPr>
-              <a:spcAft>
-                <a:spcPts val="1000"/>
-              </a:spcAft>
+            <a:pPr lvl="0" marL="457200" indent="-228600">
+              <a:buFont typeface="Calibri"/>
+              <a:spcAft>
+                <a:spcPts val="1000"/>
+              </a:spcAft>
+              <a:buSzPct val="100000"/>
               <a:buChar char="•"/>
               <a:lnSpc>
                 <a:spcPts val="2200"/>
@@ -12796,10 +12932,12 @@
             </a:r>
           </a:p>
           <a:p>
-            <a:pPr>
-              <a:spcAft>
-                <a:spcPts val="1000"/>
-              </a:spcAft>
+            <a:pPr lvl="0" marL="457200" indent="-228600">
+              <a:buFont typeface="Calibri"/>
+              <a:spcAft>
+                <a:spcPts val="1000"/>
+              </a:spcAft>
+              <a:buSzPct val="100000"/>
               <a:buChar char="•"/>
               <a:lnSpc>
                 <a:spcPts val="2200"/>
@@ -12816,10 +12954,12 @@
             </a:r>
           </a:p>
           <a:p>
-            <a:pPr>
-              <a:spcAft>
-                <a:spcPts val="1000"/>
-              </a:spcAft>
+            <a:pPr lvl="0" marL="457200" indent="-228600">
+              <a:buFont typeface="Calibri"/>
+              <a:spcAft>
+                <a:spcPts val="1000"/>
+              </a:spcAft>
+              <a:buSzPct val="100000"/>
               <a:buChar char="•"/>
               <a:lnSpc>
                 <a:spcPts val="2200"/>
@@ -12836,10 +12976,12 @@
             </a:r>
           </a:p>
           <a:p>
-            <a:pPr>
-              <a:spcAft>
-                <a:spcPts val="1000"/>
-              </a:spcAft>
+            <a:pPr lvl="0" marL="457200" indent="-228600">
+              <a:buFont typeface="Calibri"/>
+              <a:spcAft>
+                <a:spcPts val="1000"/>
+              </a:spcAft>
+              <a:buSzPct val="100000"/>
               <a:buChar char="•"/>
               <a:lnSpc>
                 <a:spcPts val="2200"/>
@@ -12975,10 +13117,12 @@
           </a:bodyPr>
           <a:lstStyle/>
           <a:p>
-            <a:pPr>
-              <a:spcAft>
-                <a:spcPts val="1000"/>
-              </a:spcAft>
+            <a:pPr lvl="0" marL="457200" indent="-228600">
+              <a:buFont typeface="Calibri"/>
+              <a:spcAft>
+                <a:spcPts val="1000"/>
+              </a:spcAft>
+              <a:buSzPct val="100000"/>
               <a:buChar char="•"/>
               <a:lnSpc>
                 <a:spcPts val="2200"/>
@@ -12995,10 +13139,12 @@
             </a:r>
           </a:p>
           <a:p>
-            <a:pPr>
-              <a:spcAft>
-                <a:spcPts val="1000"/>
-              </a:spcAft>
+            <a:pPr lvl="0" marL="457200" indent="-228600">
+              <a:buFont typeface="Calibri"/>
+              <a:spcAft>
+                <a:spcPts val="1000"/>
+              </a:spcAft>
+              <a:buSzPct val="100000"/>
               <a:buChar char="•"/>
               <a:lnSpc>
                 <a:spcPts val="2200"/>
@@ -13015,10 +13161,12 @@
             </a:r>
           </a:p>
           <a:p>
-            <a:pPr>
-              <a:spcAft>
-                <a:spcPts val="1000"/>
-              </a:spcAft>
+            <a:pPr lvl="0" marL="457200" indent="-228600">
+              <a:buFont typeface="Calibri"/>
+              <a:spcAft>
+                <a:spcPts val="1000"/>
+              </a:spcAft>
+              <a:buSzPct val="100000"/>
               <a:buChar char="•"/>
               <a:lnSpc>
                 <a:spcPts val="2200"/>
@@ -13154,10 +13302,12 @@
           </a:bodyPr>
           <a:lstStyle/>
           <a:p>
-            <a:pPr>
-              <a:spcAft>
-                <a:spcPts val="1000"/>
-              </a:spcAft>
+            <a:pPr lvl="0" marL="457200" indent="-228600">
+              <a:buFont typeface="Calibri"/>
+              <a:spcAft>
+                <a:spcPts val="1000"/>
+              </a:spcAft>
+              <a:buSzPct val="100000"/>
               <a:buChar char="•"/>
               <a:lnSpc>
                 <a:spcPts val="2200"/>
@@ -13174,10 +13324,12 @@
             </a:r>
           </a:p>
           <a:p>
-            <a:pPr>
-              <a:spcAft>
-                <a:spcPts val="1000"/>
-              </a:spcAft>
+            <a:pPr lvl="0" marL="457200" indent="-228600">
+              <a:buFont typeface="Calibri"/>
+              <a:spcAft>
+                <a:spcPts val="1000"/>
+              </a:spcAft>
+              <a:buSzPct val="100000"/>
               <a:buChar char="•"/>
               <a:lnSpc>
                 <a:spcPts val="2200"/>
@@ -13194,10 +13346,12 @@
             </a:r>
           </a:p>
           <a:p>
-            <a:pPr>
-              <a:spcAft>
-                <a:spcPts val="1000"/>
-              </a:spcAft>
+            <a:pPr lvl="0" marL="457200" indent="-228600">
+              <a:buFont typeface="Calibri"/>
+              <a:spcAft>
+                <a:spcPts val="1000"/>
+              </a:spcAft>
+              <a:buSzPct val="100000"/>
               <a:buChar char="•"/>
               <a:lnSpc>
                 <a:spcPts val="2200"/>
@@ -13214,10 +13368,12 @@
             </a:r>
           </a:p>
           <a:p>
-            <a:pPr>
-              <a:spcAft>
-                <a:spcPts val="1000"/>
-              </a:spcAft>
+            <a:pPr lvl="0" marL="457200" indent="-228600">
+              <a:buFont typeface="Calibri"/>
+              <a:spcAft>
+                <a:spcPts val="1000"/>
+              </a:spcAft>
+              <a:buSzPct val="100000"/>
               <a:buChar char="•"/>
               <a:lnSpc>
                 <a:spcPts val="2200"/>
@@ -13234,10 +13390,12 @@
             </a:r>
           </a:p>
           <a:p>
-            <a:pPr>
-              <a:spcAft>
-                <a:spcPts val="1000"/>
-              </a:spcAft>
+            <a:pPr lvl="0" marL="457200" indent="-228600">
+              <a:buFont typeface="Calibri"/>
+              <a:spcAft>
+                <a:spcPts val="1000"/>
+              </a:spcAft>
+              <a:buSzPct val="100000"/>
               <a:buChar char="•"/>
               <a:lnSpc>
                 <a:spcPts val="2200"/>
@@ -13254,10 +13412,12 @@
             </a:r>
           </a:p>
           <a:p>
-            <a:pPr>
-              <a:spcAft>
-                <a:spcPts val="1000"/>
-              </a:spcAft>
+            <a:pPr lvl="0" marL="457200" indent="-228600">
+              <a:buFont typeface="Calibri"/>
+              <a:spcAft>
+                <a:spcPts val="1000"/>
+              </a:spcAft>
+              <a:buSzPct val="100000"/>
               <a:buChar char="•"/>
               <a:lnSpc>
                 <a:spcPts val="2200"/>
@@ -13393,10 +13553,12 @@
           </a:bodyPr>
           <a:lstStyle/>
           <a:p>
-            <a:pPr>
-              <a:spcAft>
-                <a:spcPts val="1000"/>
-              </a:spcAft>
+            <a:pPr lvl="0" marL="457200" indent="-228600">
+              <a:buFont typeface="Calibri"/>
+              <a:spcAft>
+                <a:spcPts val="1000"/>
+              </a:spcAft>
+              <a:buSzPct val="100000"/>
               <a:buChar char="•"/>
               <a:lnSpc>
                 <a:spcPts val="2200"/>
@@ -13413,10 +13575,12 @@
             </a:r>
           </a:p>
           <a:p>
-            <a:pPr>
-              <a:spcAft>
-                <a:spcPts val="1000"/>
-              </a:spcAft>
+            <a:pPr lvl="0" marL="457200" indent="-228600">
+              <a:buFont typeface="Calibri"/>
+              <a:spcAft>
+                <a:spcPts val="1000"/>
+              </a:spcAft>
+              <a:buSzPct val="100000"/>
               <a:buChar char="•"/>
               <a:lnSpc>
                 <a:spcPts val="2200"/>
@@ -13433,10 +13597,12 @@
             </a:r>
           </a:p>
           <a:p>
-            <a:pPr>
-              <a:spcAft>
-                <a:spcPts val="1000"/>
-              </a:spcAft>
+            <a:pPr lvl="0" marL="457200" indent="-228600">
+              <a:buFont typeface="Calibri"/>
+              <a:spcAft>
+                <a:spcPts val="1000"/>
+              </a:spcAft>
+              <a:buSzPct val="100000"/>
               <a:buChar char="•"/>
               <a:lnSpc>
                 <a:spcPts val="2200"/>
@@ -13572,10 +13738,12 @@
           </a:bodyPr>
           <a:lstStyle/>
           <a:p>
-            <a:pPr>
-              <a:spcAft>
-                <a:spcPts val="1000"/>
-              </a:spcAft>
+            <a:pPr lvl="0" marL="457200" indent="-228600">
+              <a:buFont typeface="Calibri"/>
+              <a:spcAft>
+                <a:spcPts val="1000"/>
+              </a:spcAft>
+              <a:buSzPct val="100000"/>
               <a:buChar char="•"/>
               <a:lnSpc>
                 <a:spcPts val="2200"/>
@@ -13592,10 +13760,12 @@
             </a:r>
           </a:p>
           <a:p>
-            <a:pPr>
-              <a:spcAft>
-                <a:spcPts val="1000"/>
-              </a:spcAft>
+            <a:pPr lvl="0" marL="457200" indent="-228600">
+              <a:buFont typeface="Calibri"/>
+              <a:spcAft>
+                <a:spcPts val="1000"/>
+              </a:spcAft>
+              <a:buSzPct val="100000"/>
               <a:buChar char="•"/>
               <a:lnSpc>
                 <a:spcPts val="2200"/>
@@ -13731,10 +13901,12 @@
           </a:bodyPr>
           <a:lstStyle/>
           <a:p>
-            <a:pPr>
-              <a:spcAft>
-                <a:spcPts val="1000"/>
-              </a:spcAft>
+            <a:pPr lvl="0" marL="457200" indent="-228600">
+              <a:buFont typeface="Calibri"/>
+              <a:spcAft>
+                <a:spcPts val="1000"/>
+              </a:spcAft>
+              <a:buSzPct val="100000"/>
               <a:buChar char="•"/>
               <a:lnSpc>
                 <a:spcPts val="2200"/>
@@ -13751,10 +13923,12 @@
             </a:r>
           </a:p>
           <a:p>
-            <a:pPr>
-              <a:spcAft>
-                <a:spcPts val="1000"/>
-              </a:spcAft>
+            <a:pPr lvl="0" marL="457200" indent="-228600">
+              <a:buFont typeface="Calibri"/>
+              <a:spcAft>
+                <a:spcPts val="1000"/>
+              </a:spcAft>
+              <a:buSzPct val="100000"/>
               <a:buChar char="•"/>
               <a:lnSpc>
                 <a:spcPts val="2200"/>
@@ -13771,10 +13945,12 @@
             </a:r>
           </a:p>
           <a:p>
-            <a:pPr>
-              <a:spcAft>
-                <a:spcPts val="1000"/>
-              </a:spcAft>
+            <a:pPr lvl="0" marL="457200" indent="-228600">
+              <a:buFont typeface="Calibri"/>
+              <a:spcAft>
+                <a:spcPts val="1000"/>
+              </a:spcAft>
+              <a:buSzPct val="100000"/>
               <a:buChar char="•"/>
               <a:lnSpc>
                 <a:spcPts val="2200"/>
@@ -13910,10 +14086,12 @@
           </a:bodyPr>
           <a:lstStyle/>
           <a:p>
-            <a:pPr>
-              <a:spcAft>
-                <a:spcPts val="1000"/>
-              </a:spcAft>
+            <a:pPr lvl="0" marL="457200" indent="-228600">
+              <a:buFont typeface="Calibri"/>
+              <a:spcAft>
+                <a:spcPts val="1000"/>
+              </a:spcAft>
+              <a:buSzPct val="100000"/>
               <a:buChar char="•"/>
               <a:lnSpc>
                 <a:spcPts val="2200"/>
@@ -13930,10 +14108,12 @@
             </a:r>
           </a:p>
           <a:p>
-            <a:pPr>
-              <a:spcAft>
-                <a:spcPts val="1000"/>
-              </a:spcAft>
+            <a:pPr lvl="0" marL="457200" indent="-228600">
+              <a:buFont typeface="Calibri"/>
+              <a:spcAft>
+                <a:spcPts val="1000"/>
+              </a:spcAft>
+              <a:buSzPct val="100000"/>
               <a:buChar char="•"/>
               <a:lnSpc>
                 <a:spcPts val="2200"/>
@@ -13950,10 +14130,12 @@
             </a:r>
           </a:p>
           <a:p>
-            <a:pPr>
-              <a:spcAft>
-                <a:spcPts val="1000"/>
-              </a:spcAft>
+            <a:pPr lvl="0" marL="457200" indent="-228600">
+              <a:buFont typeface="Calibri"/>
+              <a:spcAft>
+                <a:spcPts val="1000"/>
+              </a:spcAft>
+              <a:buSzPct val="100000"/>
               <a:buChar char="•"/>
               <a:lnSpc>
                 <a:spcPts val="2200"/>
@@ -13970,10 +14152,12 @@
             </a:r>
           </a:p>
           <a:p>
-            <a:pPr>
-              <a:spcAft>
-                <a:spcPts val="1000"/>
-              </a:spcAft>
+            <a:pPr lvl="0" marL="457200" indent="-228600">
+              <a:buFont typeface="Calibri"/>
+              <a:spcAft>
+                <a:spcPts val="1000"/>
+              </a:spcAft>
+              <a:buSzPct val="100000"/>
               <a:buChar char="•"/>
               <a:lnSpc>
                 <a:spcPts val="2200"/>
@@ -14109,10 +14293,12 @@
           </a:bodyPr>
           <a:lstStyle/>
           <a:p>
-            <a:pPr>
-              <a:spcAft>
-                <a:spcPts val="1000"/>
-              </a:spcAft>
+            <a:pPr lvl="0" marL="457200" indent="-228600">
+              <a:buFont typeface="Calibri"/>
+              <a:spcAft>
+                <a:spcPts val="1000"/>
+              </a:spcAft>
+              <a:buSzPct val="100000"/>
               <a:buChar char="•"/>
               <a:lnSpc>
                 <a:spcPts val="2200"/>
@@ -14129,10 +14315,12 @@
             </a:r>
           </a:p>
           <a:p>
-            <a:pPr>
-              <a:spcAft>
-                <a:spcPts val="1000"/>
-              </a:spcAft>
+            <a:pPr lvl="0" marL="457200" indent="-228600">
+              <a:buFont typeface="Calibri"/>
+              <a:spcAft>
+                <a:spcPts val="1000"/>
+              </a:spcAft>
+              <a:buSzPct val="100000"/>
               <a:buChar char="•"/>
               <a:lnSpc>
                 <a:spcPts val="2200"/>
@@ -14149,10 +14337,12 @@
             </a:r>
           </a:p>
           <a:p>
-            <a:pPr>
-              <a:spcAft>
-                <a:spcPts val="1000"/>
-              </a:spcAft>
+            <a:pPr lvl="0" marL="457200" indent="-228600">
+              <a:buFont typeface="Calibri"/>
+              <a:spcAft>
+                <a:spcPts val="1000"/>
+              </a:spcAft>
+              <a:buSzPct val="100000"/>
               <a:buChar char="•"/>
               <a:lnSpc>
                 <a:spcPts val="2200"/>
@@ -14169,10 +14359,12 @@
             </a:r>
           </a:p>
           <a:p>
-            <a:pPr>
-              <a:spcAft>
-                <a:spcPts val="1000"/>
-              </a:spcAft>
+            <a:pPr lvl="0" marL="457200" indent="-228600">
+              <a:buFont typeface="Calibri"/>
+              <a:spcAft>
+                <a:spcPts val="1000"/>
+              </a:spcAft>
+              <a:buSzPct val="100000"/>
               <a:buChar char="•"/>
               <a:lnSpc>
                 <a:spcPts val="2200"/>
@@ -14189,10 +14381,12 @@
             </a:r>
           </a:p>
           <a:p>
-            <a:pPr>
-              <a:spcAft>
-                <a:spcPts val="1000"/>
-              </a:spcAft>
+            <a:pPr lvl="0" marL="457200" indent="-228600">
+              <a:buFont typeface="Calibri"/>
+              <a:spcAft>
+                <a:spcPts val="1000"/>
+              </a:spcAft>
+              <a:buSzPct val="100000"/>
               <a:buChar char="•"/>
               <a:lnSpc>
                 <a:spcPts val="2200"/>
@@ -14209,10 +14403,12 @@
             </a:r>
           </a:p>
           <a:p>
-            <a:pPr>
-              <a:spcAft>
-                <a:spcPts val="1000"/>
-              </a:spcAft>
+            <a:pPr lvl="0" marL="457200" indent="-228600">
+              <a:buFont typeface="Calibri"/>
+              <a:spcAft>
+                <a:spcPts val="1000"/>
+              </a:spcAft>
+              <a:buSzPct val="100000"/>
               <a:buChar char="•"/>
               <a:lnSpc>
                 <a:spcPts val="2200"/>
@@ -14348,10 +14544,12 @@
           </a:bodyPr>
           <a:lstStyle/>
           <a:p>
-            <a:pPr>
-              <a:spcAft>
-                <a:spcPts val="1000"/>
-              </a:spcAft>
+            <a:pPr lvl="0" marL="457200" indent="-228600">
+              <a:buFont typeface="Calibri"/>
+              <a:spcAft>
+                <a:spcPts val="1000"/>
+              </a:spcAft>
+              <a:buSzPct val="100000"/>
               <a:buChar char="•"/>
               <a:lnSpc>
                 <a:spcPts val="2200"/>
@@ -14368,10 +14566,12 @@
             </a:r>
           </a:p>
           <a:p>
-            <a:pPr>
-              <a:spcAft>
-                <a:spcPts val="1000"/>
-              </a:spcAft>
+            <a:pPr lvl="0" marL="457200" indent="-228600">
+              <a:buFont typeface="Calibri"/>
+              <a:spcAft>
+                <a:spcPts val="1000"/>
+              </a:spcAft>
+              <a:buSzPct val="100000"/>
               <a:buChar char="•"/>
               <a:lnSpc>
                 <a:spcPts val="2200"/>
@@ -14507,10 +14707,12 @@
           </a:bodyPr>
           <a:lstStyle/>
           <a:p>
-            <a:pPr>
-              <a:spcAft>
-                <a:spcPts val="1000"/>
-              </a:spcAft>
+            <a:pPr lvl="0" marL="457200" indent="-228600">
+              <a:buFont typeface="Calibri"/>
+              <a:spcAft>
+                <a:spcPts val="1000"/>
+              </a:spcAft>
+              <a:buSzPct val="100000"/>
               <a:buChar char="•"/>
               <a:lnSpc>
                 <a:spcPts val="2200"/>
@@ -14527,10 +14729,12 @@
             </a:r>
           </a:p>
           <a:p>
-            <a:pPr>
-              <a:spcAft>
-                <a:spcPts val="1000"/>
-              </a:spcAft>
+            <a:pPr lvl="0" marL="457200" indent="-228600">
+              <a:buFont typeface="Calibri"/>
+              <a:spcAft>
+                <a:spcPts val="1000"/>
+              </a:spcAft>
+              <a:buSzPct val="100000"/>
               <a:buChar char="•"/>
               <a:lnSpc>
                 <a:spcPts val="2200"/>
@@ -14547,10 +14751,12 @@
             </a:r>
           </a:p>
           <a:p>
-            <a:pPr>
-              <a:spcAft>
-                <a:spcPts val="1000"/>
-              </a:spcAft>
+            <a:pPr lvl="0" marL="457200" indent="-228600">
+              <a:buFont typeface="Calibri"/>
+              <a:spcAft>
+                <a:spcPts val="1000"/>
+              </a:spcAft>
+              <a:buSzPct val="100000"/>
               <a:buChar char="•"/>
               <a:lnSpc>
                 <a:spcPts val="2200"/>
@@ -14567,10 +14773,12 @@
             </a:r>
           </a:p>
           <a:p>
-            <a:pPr>
-              <a:spcAft>
-                <a:spcPts val="1000"/>
-              </a:spcAft>
+            <a:pPr lvl="0" marL="457200" indent="-228600">
+              <a:buFont typeface="Calibri"/>
+              <a:spcAft>
+                <a:spcPts val="1000"/>
+              </a:spcAft>
+              <a:buSzPct val="100000"/>
               <a:buChar char="•"/>
               <a:lnSpc>
                 <a:spcPts val="2200"/>
@@ -14587,10 +14795,12 @@
             </a:r>
           </a:p>
           <a:p>
-            <a:pPr>
-              <a:spcAft>
-                <a:spcPts val="1000"/>
-              </a:spcAft>
+            <a:pPr lvl="0" marL="457200" indent="-228600">
+              <a:buFont typeface="Calibri"/>
+              <a:spcAft>
+                <a:spcPts val="1000"/>
+              </a:spcAft>
+              <a:buSzPct val="100000"/>
               <a:buChar char="•"/>
               <a:lnSpc>
                 <a:spcPts val="2200"/>
@@ -14607,10 +14817,12 @@
             </a:r>
           </a:p>
           <a:p>
-            <a:pPr>
-              <a:spcAft>
-                <a:spcPts val="1000"/>
-              </a:spcAft>
+            <a:pPr lvl="0" marL="457200" indent="-228600">
+              <a:buFont typeface="Calibri"/>
+              <a:spcAft>
+                <a:spcPts val="1000"/>
+              </a:spcAft>
+              <a:buSzPct val="100000"/>
               <a:buChar char="•"/>
               <a:lnSpc>
                 <a:spcPts val="2200"/>
@@ -14746,10 +14958,12 @@
           </a:bodyPr>
           <a:lstStyle/>
           <a:p>
-            <a:pPr>
-              <a:spcAft>
-                <a:spcPts val="1000"/>
-              </a:spcAft>
+            <a:pPr lvl="0" marL="457200" indent="-228600">
+              <a:buFont typeface="Calibri"/>
+              <a:spcAft>
+                <a:spcPts val="1000"/>
+              </a:spcAft>
+              <a:buSzPct val="100000"/>
               <a:buChar char="•"/>
               <a:lnSpc>
                 <a:spcPts val="2200"/>
@@ -14766,10 +14980,12 @@
             </a:r>
           </a:p>
           <a:p>
-            <a:pPr>
-              <a:spcAft>
-                <a:spcPts val="1000"/>
-              </a:spcAft>
+            <a:pPr lvl="0" marL="457200" indent="-228600">
+              <a:buFont typeface="Calibri"/>
+              <a:spcAft>
+                <a:spcPts val="1000"/>
+              </a:spcAft>
+              <a:buSzPct val="100000"/>
               <a:buChar char="•"/>
               <a:lnSpc>
                 <a:spcPts val="2200"/>
@@ -14786,10 +15002,12 @@
             </a:r>
           </a:p>
           <a:p>
-            <a:pPr>
-              <a:spcAft>
-                <a:spcPts val="1000"/>
-              </a:spcAft>
+            <a:pPr lvl="0" marL="457200" indent="-228600">
+              <a:buFont typeface="Calibri"/>
+              <a:spcAft>
+                <a:spcPts val="1000"/>
+              </a:spcAft>
+              <a:buSzPct val="100000"/>
               <a:buChar char="•"/>
               <a:lnSpc>
                 <a:spcPts val="2200"/>
@@ -14925,10 +15143,12 @@
           </a:bodyPr>
           <a:lstStyle/>
           <a:p>
-            <a:pPr>
-              <a:spcAft>
-                <a:spcPts val="1000"/>
-              </a:spcAft>
+            <a:pPr lvl="0" marL="457200" indent="-228600">
+              <a:buFont typeface="Calibri"/>
+              <a:spcAft>
+                <a:spcPts val="1000"/>
+              </a:spcAft>
+              <a:buSzPct val="100000"/>
               <a:buChar char="•"/>
               <a:lnSpc>
                 <a:spcPts val="2200"/>
@@ -14945,10 +15165,12 @@
             </a:r>
           </a:p>
           <a:p>
-            <a:pPr>
-              <a:spcAft>
-                <a:spcPts val="1000"/>
-              </a:spcAft>
+            <a:pPr lvl="0" marL="457200" indent="-228600">
+              <a:buFont typeface="Calibri"/>
+              <a:spcAft>
+                <a:spcPts val="1000"/>
+              </a:spcAft>
+              <a:buSzPct val="100000"/>
               <a:buChar char="•"/>
               <a:lnSpc>
                 <a:spcPts val="2200"/>
@@ -14965,10 +15187,12 @@
             </a:r>
           </a:p>
           <a:p>
-            <a:pPr>
-              <a:spcAft>
-                <a:spcPts val="1000"/>
-              </a:spcAft>
+            <a:pPr lvl="0" marL="457200" indent="-228600">
+              <a:buFont typeface="Calibri"/>
+              <a:spcAft>
+                <a:spcPts val="1000"/>
+              </a:spcAft>
+              <a:buSzPct val="100000"/>
               <a:buChar char="•"/>
               <a:lnSpc>
                 <a:spcPts val="2200"/>
@@ -14985,10 +15209,12 @@
             </a:r>
           </a:p>
           <a:p>
-            <a:pPr>
-              <a:spcAft>
-                <a:spcPts val="1000"/>
-              </a:spcAft>
+            <a:pPr lvl="0" marL="457200" indent="-228600">
+              <a:buFont typeface="Calibri"/>
+              <a:spcAft>
+                <a:spcPts val="1000"/>
+              </a:spcAft>
+              <a:buSzPct val="100000"/>
               <a:buChar char="•"/>
               <a:lnSpc>
                 <a:spcPts val="2200"/>
@@ -15005,10 +15231,12 @@
             </a:r>
           </a:p>
           <a:p>
-            <a:pPr>
-              <a:spcAft>
-                <a:spcPts val="1000"/>
-              </a:spcAft>
+            <a:pPr lvl="0" marL="457200" indent="-228600">
+              <a:buFont typeface="Calibri"/>
+              <a:spcAft>
+                <a:spcPts val="1000"/>
+              </a:spcAft>
+              <a:buSzPct val="100000"/>
               <a:buChar char="•"/>
               <a:lnSpc>
                 <a:spcPts val="2200"/>
@@ -15025,10 +15253,12 @@
             </a:r>
           </a:p>
           <a:p>
-            <a:pPr>
-              <a:spcAft>
-                <a:spcPts val="1000"/>
-              </a:spcAft>
+            <a:pPr lvl="0" marL="457200" indent="-228600">
+              <a:buFont typeface="Calibri"/>
+              <a:spcAft>
+                <a:spcPts val="1000"/>
+              </a:spcAft>
+              <a:buSzPct val="100000"/>
               <a:buChar char="•"/>
               <a:lnSpc>
                 <a:spcPts val="2200"/>
@@ -15164,10 +15394,12 @@
           </a:bodyPr>
           <a:lstStyle/>
           <a:p>
-            <a:pPr>
-              <a:spcAft>
-                <a:spcPts val="1000"/>
-              </a:spcAft>
+            <a:pPr lvl="0" marL="457200" indent="-228600">
+              <a:buFont typeface="Calibri"/>
+              <a:spcAft>
+                <a:spcPts val="1000"/>
+              </a:spcAft>
+              <a:buSzPct val="100000"/>
               <a:buChar char="•"/>
               <a:lnSpc>
                 <a:spcPts val="2200"/>
@@ -15184,10 +15416,12 @@
             </a:r>
           </a:p>
           <a:p>
-            <a:pPr>
-              <a:spcAft>
-                <a:spcPts val="1000"/>
-              </a:spcAft>
+            <a:pPr lvl="0" marL="457200" indent="-228600">
+              <a:buFont typeface="Calibri"/>
+              <a:spcAft>
+                <a:spcPts val="1000"/>
+              </a:spcAft>
+              <a:buSzPct val="100000"/>
               <a:buChar char="•"/>
               <a:lnSpc>
                 <a:spcPts val="2200"/>
@@ -15204,10 +15438,12 @@
             </a:r>
           </a:p>
           <a:p>
-            <a:pPr>
-              <a:spcAft>
-                <a:spcPts val="1000"/>
-              </a:spcAft>
+            <a:pPr lvl="0" marL="457200" indent="-228600">
+              <a:buFont typeface="Calibri"/>
+              <a:spcAft>
+                <a:spcPts val="1000"/>
+              </a:spcAft>
+              <a:buSzPct val="100000"/>
               <a:buChar char="•"/>
               <a:lnSpc>
                 <a:spcPts val="2200"/>
@@ -15343,10 +15579,12 @@
           </a:bodyPr>
           <a:lstStyle/>
           <a:p>
-            <a:pPr>
-              <a:spcAft>
-                <a:spcPts val="1000"/>
-              </a:spcAft>
+            <a:pPr lvl="0" marL="457200" indent="-228600">
+              <a:buFont typeface="Calibri"/>
+              <a:spcAft>
+                <a:spcPts val="1000"/>
+              </a:spcAft>
+              <a:buSzPct val="100000"/>
               <a:buChar char="•"/>
               <a:lnSpc>
                 <a:spcPts val="2200"/>
@@ -15363,10 +15601,12 @@
             </a:r>
           </a:p>
           <a:p>
-            <a:pPr>
-              <a:spcAft>
-                <a:spcPts val="1000"/>
-              </a:spcAft>
+            <a:pPr lvl="0" marL="457200" indent="-228600">
+              <a:buFont typeface="Calibri"/>
+              <a:spcAft>
+                <a:spcPts val="1000"/>
+              </a:spcAft>
+              <a:buSzPct val="100000"/>
               <a:buChar char="•"/>
               <a:lnSpc>
                 <a:spcPts val="2200"/>
@@ -15383,10 +15623,12 @@
             </a:r>
           </a:p>
           <a:p>
-            <a:pPr>
-              <a:spcAft>
-                <a:spcPts val="1000"/>
-              </a:spcAft>
+            <a:pPr lvl="0" marL="457200" indent="-228600">
+              <a:buFont typeface="Calibri"/>
+              <a:spcAft>
+                <a:spcPts val="1000"/>
+              </a:spcAft>
+              <a:buSzPct val="100000"/>
               <a:buChar char="•"/>
               <a:lnSpc>
                 <a:spcPts val="2200"/>
@@ -15403,10 +15645,12 @@
             </a:r>
           </a:p>
           <a:p>
-            <a:pPr>
-              <a:spcAft>
-                <a:spcPts val="1000"/>
-              </a:spcAft>
+            <a:pPr lvl="0" marL="457200" indent="-228600">
+              <a:buFont typeface="Calibri"/>
+              <a:spcAft>
+                <a:spcPts val="1000"/>
+              </a:spcAft>
+              <a:buSzPct val="100000"/>
               <a:buChar char="•"/>
               <a:lnSpc>
                 <a:spcPts val="2200"/>
@@ -15423,10 +15667,12 @@
             </a:r>
           </a:p>
           <a:p>
-            <a:pPr>
-              <a:spcAft>
-                <a:spcPts val="1000"/>
-              </a:spcAft>
+            <a:pPr lvl="0" marL="457200" indent="-228600">
+              <a:buFont typeface="Calibri"/>
+              <a:spcAft>
+                <a:spcPts val="1000"/>
+              </a:spcAft>
+              <a:buSzPct val="100000"/>
               <a:buChar char="•"/>
               <a:lnSpc>
                 <a:spcPts val="2200"/>
@@ -15443,10 +15689,12 @@
             </a:r>
           </a:p>
           <a:p>
-            <a:pPr>
-              <a:spcAft>
-                <a:spcPts val="1000"/>
-              </a:spcAft>
+            <a:pPr lvl="0" marL="457200" indent="-228600">
+              <a:buFont typeface="Calibri"/>
+              <a:spcAft>
+                <a:spcPts val="1000"/>
+              </a:spcAft>
+              <a:buSzPct val="100000"/>
               <a:buChar char="•"/>
               <a:lnSpc>
                 <a:spcPts val="2200"/>
@@ -15582,10 +15830,12 @@
           </a:bodyPr>
           <a:lstStyle/>
           <a:p>
-            <a:pPr>
-              <a:spcAft>
-                <a:spcPts val="1000"/>
-              </a:spcAft>
+            <a:pPr lvl="0" marL="457200" indent="-228600">
+              <a:buFont typeface="Calibri"/>
+              <a:spcAft>
+                <a:spcPts val="1000"/>
+              </a:spcAft>
+              <a:buSzPct val="100000"/>
               <a:buChar char="•"/>
               <a:lnSpc>
                 <a:spcPts val="2200"/>
@@ -15602,10 +15852,12 @@
             </a:r>
           </a:p>
           <a:p>
-            <a:pPr>
-              <a:spcAft>
-                <a:spcPts val="1000"/>
-              </a:spcAft>
+            <a:pPr lvl="0" marL="457200" indent="-228600">
+              <a:buFont typeface="Calibri"/>
+              <a:spcAft>
+                <a:spcPts val="1000"/>
+              </a:spcAft>
+              <a:buSzPct val="100000"/>
               <a:buChar char="•"/>
               <a:lnSpc>
                 <a:spcPts val="2200"/>
@@ -15622,10 +15874,12 @@
             </a:r>
           </a:p>
           <a:p>
-            <a:pPr>
-              <a:spcAft>
-                <a:spcPts val="1000"/>
-              </a:spcAft>
+            <a:pPr lvl="0" marL="457200" indent="-228600">
+              <a:buFont typeface="Calibri"/>
+              <a:spcAft>
+                <a:spcPts val="1000"/>
+              </a:spcAft>
+              <a:buSzPct val="100000"/>
               <a:buChar char="•"/>
               <a:lnSpc>
                 <a:spcPts val="2200"/>
@@ -15761,10 +16015,12 @@
           </a:bodyPr>
           <a:lstStyle/>
           <a:p>
-            <a:pPr>
-              <a:spcAft>
-                <a:spcPts val="1000"/>
-              </a:spcAft>
+            <a:pPr lvl="0" marL="457200" indent="-228600">
+              <a:buFont typeface="Calibri"/>
+              <a:spcAft>
+                <a:spcPts val="1000"/>
+              </a:spcAft>
+              <a:buSzPct val="100000"/>
               <a:buChar char="•"/>
               <a:lnSpc>
                 <a:spcPts val="2200"/>
@@ -15781,10 +16037,12 @@
             </a:r>
           </a:p>
           <a:p>
-            <a:pPr>
-              <a:spcAft>
-                <a:spcPts val="1000"/>
-              </a:spcAft>
+            <a:pPr lvl="0" marL="457200" indent="-228600">
+              <a:buFont typeface="Calibri"/>
+              <a:spcAft>
+                <a:spcPts val="1000"/>
+              </a:spcAft>
+              <a:buSzPct val="100000"/>
               <a:buChar char="•"/>
               <a:lnSpc>
                 <a:spcPts val="2200"/>
@@ -15920,10 +16178,12 @@
           </a:bodyPr>
           <a:lstStyle/>
           <a:p>
-            <a:pPr>
-              <a:spcAft>
-                <a:spcPts val="1000"/>
-              </a:spcAft>
+            <a:pPr lvl="0" marL="457200" indent="-228600">
+              <a:buFont typeface="Calibri"/>
+              <a:spcAft>
+                <a:spcPts val="1000"/>
+              </a:spcAft>
+              <a:buSzPct val="100000"/>
               <a:buChar char="•"/>
               <a:lnSpc>
                 <a:spcPts val="2200"/>
@@ -15940,10 +16200,12 @@
             </a:r>
           </a:p>
           <a:p>
-            <a:pPr>
-              <a:spcAft>
-                <a:spcPts val="1000"/>
-              </a:spcAft>
+            <a:pPr lvl="0" marL="457200" indent="-228600">
+              <a:buFont typeface="Calibri"/>
+              <a:spcAft>
+                <a:spcPts val="1000"/>
+              </a:spcAft>
+              <a:buSzPct val="100000"/>
               <a:buChar char="•"/>
               <a:lnSpc>
                 <a:spcPts val="2200"/>
@@ -16079,10 +16341,12 @@
           </a:bodyPr>
           <a:lstStyle/>
           <a:p>
-            <a:pPr>
-              <a:spcAft>
-                <a:spcPts val="1000"/>
-              </a:spcAft>
+            <a:pPr lvl="0" marL="457200" indent="-228600">
+              <a:buFont typeface="Calibri"/>
+              <a:spcAft>
+                <a:spcPts val="1000"/>
+              </a:spcAft>
+              <a:buSzPct val="100000"/>
               <a:buChar char="•"/>
               <a:lnSpc>
                 <a:spcPts val="2200"/>
@@ -16099,10 +16363,12 @@
             </a:r>
           </a:p>
           <a:p>
-            <a:pPr>
-              <a:spcAft>
-                <a:spcPts val="1000"/>
-              </a:spcAft>
+            <a:pPr lvl="0" marL="457200" indent="-228600">
+              <a:buFont typeface="Calibri"/>
+              <a:spcAft>
+                <a:spcPts val="1000"/>
+              </a:spcAft>
+              <a:buSzPct val="100000"/>
               <a:buChar char="•"/>
               <a:lnSpc>
                 <a:spcPts val="2200"/>
@@ -16119,10 +16385,12 @@
             </a:r>
           </a:p>
           <a:p>
-            <a:pPr>
-              <a:spcAft>
-                <a:spcPts val="1000"/>
-              </a:spcAft>
+            <a:pPr lvl="0" marL="457200" indent="-228600">
+              <a:buFont typeface="Calibri"/>
+              <a:spcAft>
+                <a:spcPts val="1000"/>
+              </a:spcAft>
+              <a:buSzPct val="100000"/>
               <a:buChar char="•"/>
               <a:lnSpc>
                 <a:spcPts val="2200"/>
@@ -16258,10 +16526,12 @@
           </a:bodyPr>
           <a:lstStyle/>
           <a:p>
-            <a:pPr>
-              <a:spcAft>
-                <a:spcPts val="1000"/>
-              </a:spcAft>
+            <a:pPr lvl="0" marL="457200" indent="-228600">
+              <a:buFont typeface="Calibri"/>
+              <a:spcAft>
+                <a:spcPts val="1000"/>
+              </a:spcAft>
+              <a:buSzPct val="100000"/>
               <a:buChar char="•"/>
               <a:lnSpc>
                 <a:spcPts val="2200"/>
@@ -16278,10 +16548,12 @@
             </a:r>
           </a:p>
           <a:p>
-            <a:pPr>
-              <a:spcAft>
-                <a:spcPts val="1000"/>
-              </a:spcAft>
+            <a:pPr lvl="0" marL="457200" indent="-228600">
+              <a:buFont typeface="Calibri"/>
+              <a:spcAft>
+                <a:spcPts val="1000"/>
+              </a:spcAft>
+              <a:buSzPct val="100000"/>
               <a:buChar char="•"/>
               <a:lnSpc>
                 <a:spcPts val="2200"/>
@@ -16298,10 +16570,12 @@
             </a:r>
           </a:p>
           <a:p>
-            <a:pPr>
-              <a:spcAft>
-                <a:spcPts val="1000"/>
-              </a:spcAft>
+            <a:pPr lvl="0" marL="457200" indent="-228600">
+              <a:buFont typeface="Calibri"/>
+              <a:spcAft>
+                <a:spcPts val="1000"/>
+              </a:spcAft>
+              <a:buSzPct val="100000"/>
               <a:buChar char="•"/>
               <a:lnSpc>
                 <a:spcPts val="2200"/>
@@ -16318,10 +16592,12 @@
             </a:r>
           </a:p>
           <a:p>
-            <a:pPr>
-              <a:spcAft>
-                <a:spcPts val="1000"/>
-              </a:spcAft>
+            <a:pPr lvl="0" marL="457200" indent="-228600">
+              <a:buFont typeface="Calibri"/>
+              <a:spcAft>
+                <a:spcPts val="1000"/>
+              </a:spcAft>
+              <a:buSzPct val="100000"/>
               <a:buChar char="•"/>
               <a:lnSpc>
                 <a:spcPts val="2200"/>
@@ -16457,10 +16733,12 @@
           </a:bodyPr>
           <a:lstStyle/>
           <a:p>
-            <a:pPr>
-              <a:spcAft>
-                <a:spcPts val="1000"/>
-              </a:spcAft>
+            <a:pPr lvl="0" marL="457200" indent="-228600">
+              <a:buFont typeface="Calibri"/>
+              <a:spcAft>
+                <a:spcPts val="1000"/>
+              </a:spcAft>
+              <a:buSzPct val="100000"/>
               <a:buChar char="•"/>
               <a:lnSpc>
                 <a:spcPts val="2200"/>
@@ -16477,10 +16755,12 @@
             </a:r>
           </a:p>
           <a:p>
-            <a:pPr>
-              <a:spcAft>
-                <a:spcPts val="1000"/>
-              </a:spcAft>
+            <a:pPr lvl="0" marL="457200" indent="-228600">
+              <a:buFont typeface="Calibri"/>
+              <a:spcAft>
+                <a:spcPts val="1000"/>
+              </a:spcAft>
+              <a:buSzPct val="100000"/>
               <a:buChar char="•"/>
               <a:lnSpc>
                 <a:spcPts val="2200"/>
@@ -16497,10 +16777,12 @@
             </a:r>
           </a:p>
           <a:p>
-            <a:pPr>
-              <a:spcAft>
-                <a:spcPts val="1000"/>
-              </a:spcAft>
+            <a:pPr lvl="0" marL="457200" indent="-228600">
+              <a:buFont typeface="Calibri"/>
+              <a:spcAft>
+                <a:spcPts val="1000"/>
+              </a:spcAft>
+              <a:buSzPct val="100000"/>
               <a:buChar char="•"/>
               <a:lnSpc>
                 <a:spcPts val="2200"/>
@@ -16517,10 +16799,12 @@
             </a:r>
           </a:p>
           <a:p>
-            <a:pPr>
-              <a:spcAft>
-                <a:spcPts val="1000"/>
-              </a:spcAft>
+            <a:pPr lvl="0" marL="457200" indent="-228600">
+              <a:buFont typeface="Calibri"/>
+              <a:spcAft>
+                <a:spcPts val="1000"/>
+              </a:spcAft>
+              <a:buSzPct val="100000"/>
               <a:buChar char="•"/>
               <a:lnSpc>
                 <a:spcPts val="2200"/>
@@ -16537,10 +16821,12 @@
             </a:r>
           </a:p>
           <a:p>
-            <a:pPr>
-              <a:spcAft>
-                <a:spcPts val="1000"/>
-              </a:spcAft>
+            <a:pPr lvl="0" marL="457200" indent="-228600">
+              <a:buFont typeface="Calibri"/>
+              <a:spcAft>
+                <a:spcPts val="1000"/>
+              </a:spcAft>
+              <a:buSzPct val="100000"/>
               <a:buChar char="•"/>
               <a:lnSpc>
                 <a:spcPts val="2200"/>
@@ -16676,10 +16962,12 @@
           </a:bodyPr>
           <a:lstStyle/>
           <a:p>
-            <a:pPr>
-              <a:spcAft>
-                <a:spcPts val="1000"/>
-              </a:spcAft>
+            <a:pPr lvl="0" marL="457200" indent="-228600">
+              <a:buFont typeface="Calibri"/>
+              <a:spcAft>
+                <a:spcPts val="1000"/>
+              </a:spcAft>
+              <a:buSzPct val="100000"/>
               <a:buChar char="•"/>
               <a:lnSpc>
                 <a:spcPts val="2200"/>
@@ -16696,10 +16984,12 @@
             </a:r>
           </a:p>
           <a:p>
-            <a:pPr>
-              <a:spcAft>
-                <a:spcPts val="1000"/>
-              </a:spcAft>
+            <a:pPr lvl="0" marL="457200" indent="-228600">
+              <a:buFont typeface="Calibri"/>
+              <a:spcAft>
+                <a:spcPts val="1000"/>
+              </a:spcAft>
+              <a:buSzPct val="100000"/>
               <a:buChar char="•"/>
               <a:lnSpc>
                 <a:spcPts val="2200"/>
@@ -16716,10 +17006,12 @@
             </a:r>
           </a:p>
           <a:p>
-            <a:pPr>
-              <a:spcAft>
-                <a:spcPts val="1000"/>
-              </a:spcAft>
+            <a:pPr lvl="0" marL="457200" indent="-228600">
+              <a:buFont typeface="Calibri"/>
+              <a:spcAft>
+                <a:spcPts val="1000"/>
+              </a:spcAft>
+              <a:buSzPct val="100000"/>
               <a:buChar char="•"/>
               <a:lnSpc>
                 <a:spcPts val="2200"/>
@@ -16736,10 +17028,12 @@
             </a:r>
           </a:p>
           <a:p>
-            <a:pPr>
-              <a:spcAft>
-                <a:spcPts val="1000"/>
-              </a:spcAft>
+            <a:pPr lvl="0" marL="457200" indent="-228600">
+              <a:buFont typeface="Calibri"/>
+              <a:spcAft>
+                <a:spcPts val="1000"/>
+              </a:spcAft>
+              <a:buSzPct val="100000"/>
               <a:buChar char="•"/>
               <a:lnSpc>
                 <a:spcPts val="2200"/>
@@ -16875,10 +17169,12 @@
           </a:bodyPr>
           <a:lstStyle/>
           <a:p>
-            <a:pPr>
-              <a:spcAft>
-                <a:spcPts val="1000"/>
-              </a:spcAft>
+            <a:pPr lvl="0" marL="457200" indent="-228600">
+              <a:buFont typeface="Calibri"/>
+              <a:spcAft>
+                <a:spcPts val="1000"/>
+              </a:spcAft>
+              <a:buSzPct val="100000"/>
               <a:buChar char="•"/>
               <a:lnSpc>
                 <a:spcPts val="2200"/>
@@ -16895,10 +17191,12 @@
             </a:r>
           </a:p>
           <a:p>
-            <a:pPr>
-              <a:spcAft>
-                <a:spcPts val="1000"/>
-              </a:spcAft>
+            <a:pPr lvl="0" marL="457200" indent="-228600">
+              <a:buFont typeface="Calibri"/>
+              <a:spcAft>
+                <a:spcPts val="1000"/>
+              </a:spcAft>
+              <a:buSzPct val="100000"/>
               <a:buChar char="•"/>
               <a:lnSpc>
                 <a:spcPts val="2200"/>
@@ -16915,10 +17213,12 @@
             </a:r>
           </a:p>
           <a:p>
-            <a:pPr>
-              <a:spcAft>
-                <a:spcPts val="1000"/>
-              </a:spcAft>
+            <a:pPr lvl="0" marL="457200" indent="-228600">
+              <a:buFont typeface="Calibri"/>
+              <a:spcAft>
+                <a:spcPts val="1000"/>
+              </a:spcAft>
+              <a:buSzPct val="100000"/>
               <a:buChar char="•"/>
               <a:lnSpc>
                 <a:spcPts val="2200"/>
@@ -16935,10 +17235,12 @@
             </a:r>
           </a:p>
           <a:p>
-            <a:pPr>
-              <a:spcAft>
-                <a:spcPts val="1000"/>
-              </a:spcAft>
+            <a:pPr lvl="0" marL="457200" indent="-228600">
+              <a:buFont typeface="Calibri"/>
+              <a:spcAft>
+                <a:spcPts val="1000"/>
+              </a:spcAft>
+              <a:buSzPct val="100000"/>
               <a:buChar char="•"/>
               <a:lnSpc>
                 <a:spcPts val="2200"/>
@@ -16955,10 +17257,12 @@
             </a:r>
           </a:p>
           <a:p>
-            <a:pPr>
-              <a:spcAft>
-                <a:spcPts val="1000"/>
-              </a:spcAft>
+            <a:pPr lvl="0" marL="457200" indent="-228600">
+              <a:buFont typeface="Calibri"/>
+              <a:spcAft>
+                <a:spcPts val="1000"/>
+              </a:spcAft>
+              <a:buSzPct val="100000"/>
               <a:buChar char="•"/>
               <a:lnSpc>
                 <a:spcPts val="2200"/>
@@ -16975,10 +17279,12 @@
             </a:r>
           </a:p>
           <a:p>
-            <a:pPr>
-              <a:spcAft>
-                <a:spcPts val="1000"/>
-              </a:spcAft>
+            <a:pPr lvl="0" marL="457200" indent="-228600">
+              <a:buFont typeface="Calibri"/>
+              <a:spcAft>
+                <a:spcPts val="1000"/>
+              </a:spcAft>
+              <a:buSzPct val="100000"/>
               <a:buChar char="•"/>
               <a:lnSpc>
                 <a:spcPts val="2200"/>
@@ -17114,10 +17420,12 @@
           </a:bodyPr>
           <a:lstStyle/>
           <a:p>
-            <a:pPr>
-              <a:spcAft>
-                <a:spcPts val="1000"/>
-              </a:spcAft>
+            <a:pPr lvl="0" marL="457200" indent="-228600">
+              <a:buFont typeface="Calibri"/>
+              <a:spcAft>
+                <a:spcPts val="1000"/>
+              </a:spcAft>
+              <a:buSzPct val="100000"/>
               <a:buChar char="•"/>
               <a:lnSpc>
                 <a:spcPts val="2200"/>
@@ -17134,10 +17442,12 @@
             </a:r>
           </a:p>
           <a:p>
-            <a:pPr>
-              <a:spcAft>
-                <a:spcPts val="1000"/>
-              </a:spcAft>
+            <a:pPr lvl="0" marL="457200" indent="-228600">
+              <a:buFont typeface="Calibri"/>
+              <a:spcAft>
+                <a:spcPts val="1000"/>
+              </a:spcAft>
+              <a:buSzPct val="100000"/>
               <a:buChar char="•"/>
               <a:lnSpc>
                 <a:spcPts val="2200"/>
@@ -17154,10 +17464,12 @@
             </a:r>
           </a:p>
           <a:p>
-            <a:pPr>
-              <a:spcAft>
-                <a:spcPts val="1000"/>
-              </a:spcAft>
+            <a:pPr lvl="0" marL="457200" indent="-228600">
+              <a:buFont typeface="Calibri"/>
+              <a:spcAft>
+                <a:spcPts val="1000"/>
+              </a:spcAft>
+              <a:buSzPct val="100000"/>
               <a:buChar char="•"/>
               <a:lnSpc>
                 <a:spcPts val="2200"/>
@@ -17293,10 +17605,12 @@
           </a:bodyPr>
           <a:lstStyle/>
           <a:p>
-            <a:pPr>
-              <a:spcAft>
-                <a:spcPts val="1000"/>
-              </a:spcAft>
+            <a:pPr lvl="0" marL="457200" indent="-228600">
+              <a:buFont typeface="Calibri"/>
+              <a:spcAft>
+                <a:spcPts val="1000"/>
+              </a:spcAft>
+              <a:buSzPct val="100000"/>
               <a:buChar char="•"/>
               <a:lnSpc>
                 <a:spcPts val="2200"/>
@@ -17313,10 +17627,12 @@
             </a:r>
           </a:p>
           <a:p>
-            <a:pPr>
-              <a:spcAft>
-                <a:spcPts val="1000"/>
-              </a:spcAft>
+            <a:pPr lvl="0" marL="457200" indent="-228600">
+              <a:buFont typeface="Calibri"/>
+              <a:spcAft>
+                <a:spcPts val="1000"/>
+              </a:spcAft>
+              <a:buSzPct val="100000"/>
               <a:buChar char="•"/>
               <a:lnSpc>
                 <a:spcPts val="2200"/>
@@ -17333,10 +17649,12 @@
             </a:r>
           </a:p>
           <a:p>
-            <a:pPr>
-              <a:spcAft>
-                <a:spcPts val="1000"/>
-              </a:spcAft>
+            <a:pPr lvl="0" marL="457200" indent="-228600">
+              <a:buFont typeface="Calibri"/>
+              <a:spcAft>
+                <a:spcPts val="1000"/>
+              </a:spcAft>
+              <a:buSzPct val="100000"/>
               <a:buChar char="•"/>
               <a:lnSpc>
                 <a:spcPts val="2200"/>
@@ -17472,10 +17790,12 @@
           </a:bodyPr>
           <a:lstStyle/>
           <a:p>
-            <a:pPr>
-              <a:spcAft>
-                <a:spcPts val="1000"/>
-              </a:spcAft>
+            <a:pPr lvl="0" marL="457200" indent="-228600">
+              <a:buFont typeface="Calibri"/>
+              <a:spcAft>
+                <a:spcPts val="1000"/>
+              </a:spcAft>
+              <a:buSzPct val="100000"/>
               <a:buChar char="•"/>
               <a:lnSpc>
                 <a:spcPts val="2200"/>
@@ -17492,10 +17812,12 @@
             </a:r>
           </a:p>
           <a:p>
-            <a:pPr>
-              <a:spcAft>
-                <a:spcPts val="1000"/>
-              </a:spcAft>
+            <a:pPr lvl="0" marL="457200" indent="-228600">
+              <a:buFont typeface="Calibri"/>
+              <a:spcAft>
+                <a:spcPts val="1000"/>
+              </a:spcAft>
+              <a:buSzPct val="100000"/>
               <a:buChar char="•"/>
               <a:lnSpc>
                 <a:spcPts val="2200"/>
@@ -17631,10 +17953,12 @@
           </a:bodyPr>
           <a:lstStyle/>
           <a:p>
-            <a:pPr>
-              <a:spcAft>
-                <a:spcPts val="1000"/>
-              </a:spcAft>
+            <a:pPr lvl="0" marL="457200" indent="-228600">
+              <a:buFont typeface="Calibri"/>
+              <a:spcAft>
+                <a:spcPts val="1000"/>
+              </a:spcAft>
+              <a:buSzPct val="100000"/>
               <a:buChar char="•"/>
               <a:lnSpc>
                 <a:spcPts val="2200"/>
@@ -17651,10 +17975,12 @@
             </a:r>
           </a:p>
           <a:p>
-            <a:pPr>
-              <a:spcAft>
-                <a:spcPts val="1000"/>
-              </a:spcAft>
+            <a:pPr lvl="0" marL="457200" indent="-228600">
+              <a:buFont typeface="Calibri"/>
+              <a:spcAft>
+                <a:spcPts val="1000"/>
+              </a:spcAft>
+              <a:buSzPct val="100000"/>
               <a:buChar char="•"/>
               <a:lnSpc>
                 <a:spcPts val="2200"/>
@@ -17790,10 +18116,12 @@
           </a:bodyPr>
           <a:lstStyle/>
           <a:p>
-            <a:pPr>
-              <a:spcAft>
-                <a:spcPts val="1000"/>
-              </a:spcAft>
+            <a:pPr lvl="0" marL="457200" indent="-228600">
+              <a:buFont typeface="Calibri"/>
+              <a:spcAft>
+                <a:spcPts val="1000"/>
+              </a:spcAft>
+              <a:buSzPct val="100000"/>
               <a:buChar char="•"/>
               <a:lnSpc>
                 <a:spcPts val="2200"/>
@@ -17810,10 +18138,12 @@
             </a:r>
           </a:p>
           <a:p>
-            <a:pPr>
-              <a:spcAft>
-                <a:spcPts val="1000"/>
-              </a:spcAft>
+            <a:pPr lvl="0" marL="457200" indent="-228600">
+              <a:buFont typeface="Calibri"/>
+              <a:spcAft>
+                <a:spcPts val="1000"/>
+              </a:spcAft>
+              <a:buSzPct val="100000"/>
               <a:buChar char="•"/>
               <a:lnSpc>
                 <a:spcPts val="2200"/>
@@ -17830,10 +18160,12 @@
             </a:r>
           </a:p>
           <a:p>
-            <a:pPr>
-              <a:spcAft>
-                <a:spcPts val="1000"/>
-              </a:spcAft>
+            <a:pPr lvl="0" marL="457200" indent="-228600">
+              <a:buFont typeface="Calibri"/>
+              <a:spcAft>
+                <a:spcPts val="1000"/>
+              </a:spcAft>
+              <a:buSzPct val="100000"/>
               <a:buChar char="•"/>
               <a:lnSpc>
                 <a:spcPts val="2200"/>
@@ -17850,10 +18182,12 @@
             </a:r>
           </a:p>
           <a:p>
-            <a:pPr>
-              <a:spcAft>
-                <a:spcPts val="1000"/>
-              </a:spcAft>
+            <a:pPr lvl="0" marL="457200" indent="-228600">
+              <a:buFont typeface="Calibri"/>
+              <a:spcAft>
+                <a:spcPts val="1000"/>
+              </a:spcAft>
+              <a:buSzPct val="100000"/>
               <a:buChar char="•"/>
               <a:lnSpc>
                 <a:spcPts val="2200"/>
@@ -17989,10 +18323,12 @@
           </a:bodyPr>
           <a:lstStyle/>
           <a:p>
-            <a:pPr>
-              <a:spcAft>
-                <a:spcPts val="1000"/>
-              </a:spcAft>
+            <a:pPr lvl="0" marL="457200" indent="-228600">
+              <a:buFont typeface="Calibri"/>
+              <a:spcAft>
+                <a:spcPts val="1000"/>
+              </a:spcAft>
+              <a:buSzPct val="100000"/>
               <a:buChar char="•"/>
               <a:lnSpc>
                 <a:spcPts val="2200"/>
@@ -18009,10 +18345,12 @@
             </a:r>
           </a:p>
           <a:p>
-            <a:pPr>
-              <a:spcAft>
-                <a:spcPts val="1000"/>
-              </a:spcAft>
+            <a:pPr lvl="0" marL="457200" indent="-228600">
+              <a:buFont typeface="Calibri"/>
+              <a:spcAft>
+                <a:spcPts val="1000"/>
+              </a:spcAft>
+              <a:buSzPct val="100000"/>
               <a:buChar char="•"/>
               <a:lnSpc>
                 <a:spcPts val="2200"/>
@@ -18148,10 +18486,12 @@
           </a:bodyPr>
           <a:lstStyle/>
           <a:p>
-            <a:pPr>
-              <a:spcAft>
-                <a:spcPts val="1000"/>
-              </a:spcAft>
+            <a:pPr lvl="0" marL="457200" indent="-228600">
+              <a:buFont typeface="Calibri"/>
+              <a:spcAft>
+                <a:spcPts val="1000"/>
+              </a:spcAft>
+              <a:buSzPct val="100000"/>
               <a:buChar char="•"/>
               <a:lnSpc>
                 <a:spcPts val="2200"/>
@@ -18168,10 +18508,12 @@
             </a:r>
           </a:p>
           <a:p>
-            <a:pPr>
-              <a:spcAft>
-                <a:spcPts val="1000"/>
-              </a:spcAft>
+            <a:pPr lvl="0" marL="457200" indent="-228600">
+              <a:buFont typeface="Calibri"/>
+              <a:spcAft>
+                <a:spcPts val="1000"/>
+              </a:spcAft>
+              <a:buSzPct val="100000"/>
               <a:buChar char="•"/>
               <a:lnSpc>
                 <a:spcPts val="2200"/>
@@ -18188,10 +18530,12 @@
             </a:r>
           </a:p>
           <a:p>
-            <a:pPr>
-              <a:spcAft>
-                <a:spcPts val="1000"/>
-              </a:spcAft>
+            <a:pPr lvl="0" marL="457200" indent="-228600">
+              <a:buFont typeface="Calibri"/>
+              <a:spcAft>
+                <a:spcPts val="1000"/>
+              </a:spcAft>
+              <a:buSzPct val="100000"/>
               <a:buChar char="•"/>
               <a:lnSpc>
                 <a:spcPts val="2200"/>
@@ -18208,10 +18552,12 @@
             </a:r>
           </a:p>
           <a:p>
-            <a:pPr>
-              <a:spcAft>
-                <a:spcPts val="1000"/>
-              </a:spcAft>
+            <a:pPr lvl="0" marL="457200" indent="-228600">
+              <a:buFont typeface="Calibri"/>
+              <a:spcAft>
+                <a:spcPts val="1000"/>
+              </a:spcAft>
+              <a:buSzPct val="100000"/>
               <a:buChar char="•"/>
               <a:lnSpc>
                 <a:spcPts val="2200"/>
@@ -18228,10 +18574,12 @@
             </a:r>
           </a:p>
           <a:p>
-            <a:pPr>
-              <a:spcAft>
-                <a:spcPts val="1000"/>
-              </a:spcAft>
+            <a:pPr lvl="0" marL="457200" indent="-228600">
+              <a:buFont typeface="Calibri"/>
+              <a:spcAft>
+                <a:spcPts val="1000"/>
+              </a:spcAft>
+              <a:buSzPct val="100000"/>
               <a:buChar char="•"/>
               <a:lnSpc>
                 <a:spcPts val="2200"/>
@@ -18367,10 +18715,12 @@
           </a:bodyPr>
           <a:lstStyle/>
           <a:p>
-            <a:pPr>
-              <a:spcAft>
-                <a:spcPts val="1000"/>
-              </a:spcAft>
+            <a:pPr lvl="0" marL="457200" indent="-228600">
+              <a:buFont typeface="Calibri"/>
+              <a:spcAft>
+                <a:spcPts val="1000"/>
+              </a:spcAft>
+              <a:buSzPct val="100000"/>
               <a:buChar char="•"/>
               <a:lnSpc>
                 <a:spcPts val="2200"/>
@@ -18387,10 +18737,12 @@
             </a:r>
           </a:p>
           <a:p>
-            <a:pPr>
-              <a:spcAft>
-                <a:spcPts val="1000"/>
-              </a:spcAft>
+            <a:pPr lvl="0" marL="457200" indent="-228600">
+              <a:buFont typeface="Calibri"/>
+              <a:spcAft>
+                <a:spcPts val="1000"/>
+              </a:spcAft>
+              <a:buSzPct val="100000"/>
               <a:buChar char="•"/>
               <a:lnSpc>
                 <a:spcPts val="2200"/>
@@ -18407,10 +18759,12 @@
             </a:r>
           </a:p>
           <a:p>
-            <a:pPr>
-              <a:spcAft>
-                <a:spcPts val="1000"/>
-              </a:spcAft>
+            <a:pPr lvl="0" marL="457200" indent="-228600">
+              <a:buFont typeface="Calibri"/>
+              <a:spcAft>
+                <a:spcPts val="1000"/>
+              </a:spcAft>
+              <a:buSzPct val="100000"/>
               <a:buChar char="•"/>
               <a:lnSpc>
                 <a:spcPts val="2200"/>
@@ -18427,10 +18781,12 @@
             </a:r>
           </a:p>
           <a:p>
-            <a:pPr>
-              <a:spcAft>
-                <a:spcPts val="1000"/>
-              </a:spcAft>
+            <a:pPr lvl="0" marL="457200" indent="-228600">
+              <a:buFont typeface="Calibri"/>
+              <a:spcAft>
+                <a:spcPts val="1000"/>
+              </a:spcAft>
+              <a:buSzPct val="100000"/>
               <a:buChar char="•"/>
               <a:lnSpc>
                 <a:spcPts val="2200"/>
@@ -18447,10 +18803,12 @@
             </a:r>
           </a:p>
           <a:p>
-            <a:pPr>
-              <a:spcAft>
-                <a:spcPts val="1000"/>
-              </a:spcAft>
+            <a:pPr lvl="0" marL="457200" indent="-228600">
+              <a:buFont typeface="Calibri"/>
+              <a:spcAft>
+                <a:spcPts val="1000"/>
+              </a:spcAft>
+              <a:buSzPct val="100000"/>
               <a:buChar char="•"/>
               <a:lnSpc>
                 <a:spcPts val="2200"/>
@@ -18467,10 +18825,12 @@
             </a:r>
           </a:p>
           <a:p>
-            <a:pPr>
-              <a:spcAft>
-                <a:spcPts val="1000"/>
-              </a:spcAft>
+            <a:pPr lvl="0" marL="457200" indent="-228600">
+              <a:buFont typeface="Calibri"/>
+              <a:spcAft>
+                <a:spcPts val="1000"/>
+              </a:spcAft>
+              <a:buSzPct val="100000"/>
               <a:buChar char="•"/>
               <a:lnSpc>
                 <a:spcPts val="2200"/>
@@ -18606,10 +18966,12 @@
           </a:bodyPr>
           <a:lstStyle/>
           <a:p>
-            <a:pPr>
-              <a:spcAft>
-                <a:spcPts val="1000"/>
-              </a:spcAft>
+            <a:pPr lvl="0" marL="457200" indent="-228600">
+              <a:buFont typeface="Calibri"/>
+              <a:spcAft>
+                <a:spcPts val="1000"/>
+              </a:spcAft>
+              <a:buSzPct val="100000"/>
               <a:buChar char="•"/>
               <a:lnSpc>
                 <a:spcPts val="2200"/>
@@ -18626,10 +18988,12 @@
             </a:r>
           </a:p>
           <a:p>
-            <a:pPr>
-              <a:spcAft>
-                <a:spcPts val="1000"/>
-              </a:spcAft>
+            <a:pPr lvl="0" marL="457200" indent="-228600">
+              <a:buFont typeface="Calibri"/>
+              <a:spcAft>
+                <a:spcPts val="1000"/>
+              </a:spcAft>
+              <a:buSzPct val="100000"/>
               <a:buChar char="•"/>
               <a:lnSpc>
                 <a:spcPts val="2200"/>
@@ -18646,10 +19010,12 @@
             </a:r>
           </a:p>
           <a:p>
-            <a:pPr>
-              <a:spcAft>
-                <a:spcPts val="1000"/>
-              </a:spcAft>
+            <a:pPr lvl="0" marL="457200" indent="-228600">
+              <a:buFont typeface="Calibri"/>
+              <a:spcAft>
+                <a:spcPts val="1000"/>
+              </a:spcAft>
+              <a:buSzPct val="100000"/>
               <a:buChar char="•"/>
               <a:lnSpc>
                 <a:spcPts val="2200"/>
@@ -18666,10 +19032,12 @@
             </a:r>
           </a:p>
           <a:p>
-            <a:pPr>
-              <a:spcAft>
-                <a:spcPts val="1000"/>
-              </a:spcAft>
+            <a:pPr lvl="0" marL="457200" indent="-228600">
+              <a:buFont typeface="Calibri"/>
+              <a:spcAft>
+                <a:spcPts val="1000"/>
+              </a:spcAft>
+              <a:buSzPct val="100000"/>
               <a:buChar char="•"/>
               <a:lnSpc>
                 <a:spcPts val="2200"/>
@@ -18686,10 +19054,12 @@
             </a:r>
           </a:p>
           <a:p>
-            <a:pPr>
-              <a:spcAft>
-                <a:spcPts val="1000"/>
-              </a:spcAft>
+            <a:pPr lvl="0" marL="457200" indent="-228600">
+              <a:buFont typeface="Calibri"/>
+              <a:spcAft>
+                <a:spcPts val="1000"/>
+              </a:spcAft>
+              <a:buSzPct val="100000"/>
               <a:buChar char="•"/>
               <a:lnSpc>
                 <a:spcPts val="2200"/>
@@ -18706,10 +19076,12 @@
             </a:r>
           </a:p>
           <a:p>
-            <a:pPr>
-              <a:spcAft>
-                <a:spcPts val="1000"/>
-              </a:spcAft>
+            <a:pPr lvl="0" marL="457200" indent="-228600">
+              <a:buFont typeface="Calibri"/>
+              <a:spcAft>
+                <a:spcPts val="1000"/>
+              </a:spcAft>
+              <a:buSzPct val="100000"/>
               <a:buChar char="•"/>
               <a:lnSpc>
                 <a:spcPts val="2200"/>
@@ -18845,10 +19217,12 @@
           </a:bodyPr>
           <a:lstStyle/>
           <a:p>
-            <a:pPr>
-              <a:spcAft>
-                <a:spcPts val="1000"/>
-              </a:spcAft>
+            <a:pPr lvl="0" marL="457200" indent="-228600">
+              <a:buFont typeface="Calibri"/>
+              <a:spcAft>
+                <a:spcPts val="1000"/>
+              </a:spcAft>
+              <a:buSzPct val="100000"/>
               <a:buChar char="•"/>
               <a:lnSpc>
                 <a:spcPts val="2200"/>
@@ -18865,10 +19239,12 @@
             </a:r>
           </a:p>
           <a:p>
-            <a:pPr>
-              <a:spcAft>
-                <a:spcPts val="1000"/>
-              </a:spcAft>
+            <a:pPr lvl="0" marL="457200" indent="-228600">
+              <a:buFont typeface="Calibri"/>
+              <a:spcAft>
+                <a:spcPts val="1000"/>
+              </a:spcAft>
+              <a:buSzPct val="100000"/>
               <a:buChar char="•"/>
               <a:lnSpc>
                 <a:spcPts val="2200"/>
@@ -18885,10 +19261,12 @@
             </a:r>
           </a:p>
           <a:p>
-            <a:pPr>
-              <a:spcAft>
-                <a:spcPts val="1000"/>
-              </a:spcAft>
+            <a:pPr lvl="0" marL="457200" indent="-228600">
+              <a:buFont typeface="Calibri"/>
+              <a:spcAft>
+                <a:spcPts val="1000"/>
+              </a:spcAft>
+              <a:buSzPct val="100000"/>
               <a:buChar char="•"/>
               <a:lnSpc>
                 <a:spcPts val="2200"/>
@@ -18905,10 +19283,12 @@
             </a:r>
           </a:p>
           <a:p>
-            <a:pPr>
-              <a:spcAft>
-                <a:spcPts val="1000"/>
-              </a:spcAft>
+            <a:pPr lvl="0" marL="457200" indent="-228600">
+              <a:buFont typeface="Calibri"/>
+              <a:spcAft>
+                <a:spcPts val="1000"/>
+              </a:spcAft>
+              <a:buSzPct val="100000"/>
               <a:buChar char="•"/>
               <a:lnSpc>
                 <a:spcPts val="2200"/>
@@ -18925,10 +19305,12 @@
             </a:r>
           </a:p>
           <a:p>
-            <a:pPr>
-              <a:spcAft>
-                <a:spcPts val="1000"/>
-              </a:spcAft>
+            <a:pPr lvl="0" marL="457200" indent="-228600">
+              <a:buFont typeface="Calibri"/>
+              <a:spcAft>
+                <a:spcPts val="1000"/>
+              </a:spcAft>
+              <a:buSzPct val="100000"/>
               <a:buChar char="•"/>
               <a:lnSpc>
                 <a:spcPts val="2200"/>
@@ -18945,10 +19327,12 @@
             </a:r>
           </a:p>
           <a:p>
-            <a:pPr>
-              <a:spcAft>
-                <a:spcPts val="1000"/>
-              </a:spcAft>
+            <a:pPr lvl="0" marL="457200" indent="-228600">
+              <a:buFont typeface="Calibri"/>
+              <a:spcAft>
+                <a:spcPts val="1000"/>
+              </a:spcAft>
+              <a:buSzPct val="100000"/>
               <a:buChar char="•"/>
               <a:lnSpc>
                 <a:spcPts val="2200"/>
@@ -19084,10 +19468,12 @@
           </a:bodyPr>
           <a:lstStyle/>
           <a:p>
-            <a:pPr>
-              <a:spcAft>
-                <a:spcPts val="1000"/>
-              </a:spcAft>
+            <a:pPr lvl="0" marL="457200" indent="-228600">
+              <a:buFont typeface="Calibri"/>
+              <a:spcAft>
+                <a:spcPts val="1000"/>
+              </a:spcAft>
+              <a:buSzPct val="100000"/>
               <a:buChar char="•"/>
               <a:lnSpc>
                 <a:spcPts val="2200"/>
@@ -19104,10 +19490,12 @@
             </a:r>
           </a:p>
           <a:p>
-            <a:pPr>
-              <a:spcAft>
-                <a:spcPts val="1000"/>
-              </a:spcAft>
+            <a:pPr lvl="0" marL="457200" indent="-228600">
+              <a:buFont typeface="Calibri"/>
+              <a:spcAft>
+                <a:spcPts val="1000"/>
+              </a:spcAft>
+              <a:buSzPct val="100000"/>
               <a:buChar char="•"/>
               <a:lnSpc>
                 <a:spcPts val="2200"/>
@@ -19243,10 +19631,12 @@
           </a:bodyPr>
           <a:lstStyle/>
           <a:p>
-            <a:pPr>
-              <a:spcAft>
-                <a:spcPts val="1000"/>
-              </a:spcAft>
+            <a:pPr lvl="0" marL="457200" indent="-228600">
+              <a:buFont typeface="Calibri"/>
+              <a:spcAft>
+                <a:spcPts val="1000"/>
+              </a:spcAft>
+              <a:buSzPct val="100000"/>
               <a:buChar char="•"/>
               <a:lnSpc>
                 <a:spcPts val="2200"/>
@@ -19263,10 +19653,12 @@
             </a:r>
           </a:p>
           <a:p>
-            <a:pPr>
-              <a:spcAft>
-                <a:spcPts val="1000"/>
-              </a:spcAft>
+            <a:pPr lvl="0" marL="457200" indent="-228600">
+              <a:buFont typeface="Calibri"/>
+              <a:spcAft>
+                <a:spcPts val="1000"/>
+              </a:spcAft>
+              <a:buSzPct val="100000"/>
               <a:buChar char="•"/>
               <a:lnSpc>
                 <a:spcPts val="2200"/>
@@ -19283,10 +19675,12 @@
             </a:r>
           </a:p>
           <a:p>
-            <a:pPr>
-              <a:spcAft>
-                <a:spcPts val="1000"/>
-              </a:spcAft>
+            <a:pPr lvl="0" marL="457200" indent="-228600">
+              <a:buFont typeface="Calibri"/>
+              <a:spcAft>
+                <a:spcPts val="1000"/>
+              </a:spcAft>
+              <a:buSzPct val="100000"/>
               <a:buChar char="•"/>
               <a:lnSpc>
                 <a:spcPts val="2200"/>
@@ -19303,10 +19697,12 @@
             </a:r>
           </a:p>
           <a:p>
-            <a:pPr>
-              <a:spcAft>
-                <a:spcPts val="1000"/>
-              </a:spcAft>
+            <a:pPr lvl="0" marL="457200" indent="-228600">
+              <a:buFont typeface="Calibri"/>
+              <a:spcAft>
+                <a:spcPts val="1000"/>
+              </a:spcAft>
+              <a:buSzPct val="100000"/>
               <a:buChar char="•"/>
               <a:lnSpc>
                 <a:spcPts val="2200"/>
@@ -19323,10 +19719,12 @@
             </a:r>
           </a:p>
           <a:p>
-            <a:pPr>
-              <a:spcAft>
-                <a:spcPts val="1000"/>
-              </a:spcAft>
+            <a:pPr lvl="0" marL="457200" indent="-228600">
+              <a:buFont typeface="Calibri"/>
+              <a:spcAft>
+                <a:spcPts val="1000"/>
+              </a:spcAft>
+              <a:buSzPct val="100000"/>
               <a:buChar char="•"/>
               <a:lnSpc>
                 <a:spcPts val="2200"/>
@@ -19343,10 +19741,12 @@
             </a:r>
           </a:p>
           <a:p>
-            <a:pPr>
-              <a:spcAft>
-                <a:spcPts val="1000"/>
-              </a:spcAft>
+            <a:pPr lvl="0" marL="457200" indent="-228600">
+              <a:buFont typeface="Calibri"/>
+              <a:spcAft>
+                <a:spcPts val="1000"/>
+              </a:spcAft>
+              <a:buSzPct val="100000"/>
               <a:buChar char="•"/>
               <a:lnSpc>
                 <a:spcPts val="2200"/>
@@ -19482,10 +19882,12 @@
           </a:bodyPr>
           <a:lstStyle/>
           <a:p>
-            <a:pPr>
-              <a:spcAft>
-                <a:spcPts val="1000"/>
-              </a:spcAft>
+            <a:pPr lvl="0" marL="457200" indent="-228600">
+              <a:buFont typeface="Calibri"/>
+              <a:spcAft>
+                <a:spcPts val="1000"/>
+              </a:spcAft>
+              <a:buSzPct val="100000"/>
               <a:buChar char="•"/>
               <a:lnSpc>
                 <a:spcPts val="2200"/>
@@ -19502,10 +19904,12 @@
             </a:r>
           </a:p>
           <a:p>
-            <a:pPr>
-              <a:spcAft>
-                <a:spcPts val="1000"/>
-              </a:spcAft>
+            <a:pPr lvl="0" marL="457200" indent="-228600">
+              <a:buFont typeface="Calibri"/>
+              <a:spcAft>
+                <a:spcPts val="1000"/>
+              </a:spcAft>
+              <a:buSzPct val="100000"/>
               <a:buChar char="•"/>
               <a:lnSpc>
                 <a:spcPts val="2200"/>
@@ -19522,10 +19926,12 @@
             </a:r>
           </a:p>
           <a:p>
-            <a:pPr>
-              <a:spcAft>
-                <a:spcPts val="1000"/>
-              </a:spcAft>
+            <a:pPr lvl="0" marL="457200" indent="-228600">
+              <a:buFont typeface="Calibri"/>
+              <a:spcAft>
+                <a:spcPts val="1000"/>
+              </a:spcAft>
+              <a:buSzPct val="100000"/>
               <a:buChar char="•"/>
               <a:lnSpc>
                 <a:spcPts val="2200"/>
@@ -19661,10 +20067,12 @@
           </a:bodyPr>
           <a:lstStyle/>
           <a:p>
-            <a:pPr>
-              <a:spcAft>
-                <a:spcPts val="1000"/>
-              </a:spcAft>
+            <a:pPr lvl="0" marL="457200" indent="-228600">
+              <a:buFont typeface="Calibri"/>
+              <a:spcAft>
+                <a:spcPts val="1000"/>
+              </a:spcAft>
+              <a:buSzPct val="100000"/>
               <a:buChar char="•"/>
               <a:lnSpc>
                 <a:spcPts val="2200"/>
@@ -19681,10 +20089,12 @@
             </a:r>
           </a:p>
           <a:p>
-            <a:pPr>
-              <a:spcAft>
-                <a:spcPts val="1000"/>
-              </a:spcAft>
+            <a:pPr lvl="0" marL="457200" indent="-228600">
+              <a:buFont typeface="Calibri"/>
+              <a:spcAft>
+                <a:spcPts val="1000"/>
+              </a:spcAft>
+              <a:buSzPct val="100000"/>
               <a:buChar char="•"/>
               <a:lnSpc>
                 <a:spcPts val="2200"/>
@@ -19701,10 +20111,12 @@
             </a:r>
           </a:p>
           <a:p>
-            <a:pPr>
-              <a:spcAft>
-                <a:spcPts val="1000"/>
-              </a:spcAft>
+            <a:pPr lvl="0" marL="457200" indent="-228600">
+              <a:buFont typeface="Calibri"/>
+              <a:spcAft>
+                <a:spcPts val="1000"/>
+              </a:spcAft>
+              <a:buSzPct val="100000"/>
               <a:buChar char="•"/>
               <a:lnSpc>
                 <a:spcPts val="2200"/>
@@ -19840,10 +20252,12 @@
           </a:bodyPr>
           <a:lstStyle/>
           <a:p>
-            <a:pPr>
-              <a:spcAft>
-                <a:spcPts val="1000"/>
-              </a:spcAft>
+            <a:pPr lvl="0" marL="457200" indent="-228600">
+              <a:buFont typeface="Calibri"/>
+              <a:spcAft>
+                <a:spcPts val="1000"/>
+              </a:spcAft>
+              <a:buSzPct val="100000"/>
               <a:buChar char="•"/>
               <a:lnSpc>
                 <a:spcPts val="2200"/>
@@ -19860,10 +20274,12 @@
             </a:r>
           </a:p>
           <a:p>
-            <a:pPr>
-              <a:spcAft>
-                <a:spcPts val="1000"/>
-              </a:spcAft>
+            <a:pPr lvl="0" marL="457200" indent="-228600">
+              <a:buFont typeface="Calibri"/>
+              <a:spcAft>
+                <a:spcPts val="1000"/>
+              </a:spcAft>
+              <a:buSzPct val="100000"/>
               <a:buChar char="•"/>
               <a:lnSpc>
                 <a:spcPts val="2200"/>
@@ -19999,10 +20415,12 @@
           </a:bodyPr>
           <a:lstStyle/>
           <a:p>
-            <a:pPr>
-              <a:spcAft>
-                <a:spcPts val="1000"/>
-              </a:spcAft>
+            <a:pPr lvl="0" marL="457200" indent="-228600">
+              <a:buFont typeface="Calibri"/>
+              <a:spcAft>
+                <a:spcPts val="1000"/>
+              </a:spcAft>
+              <a:buSzPct val="100000"/>
               <a:buChar char="•"/>
               <a:lnSpc>
                 <a:spcPts val="2200"/>
@@ -20019,10 +20437,12 @@
             </a:r>
           </a:p>
           <a:p>
-            <a:pPr>
-              <a:spcAft>
-                <a:spcPts val="1000"/>
-              </a:spcAft>
+            <a:pPr lvl="0" marL="457200" indent="-228600">
+              <a:buFont typeface="Calibri"/>
+              <a:spcAft>
+                <a:spcPts val="1000"/>
+              </a:spcAft>
+              <a:buSzPct val="100000"/>
               <a:buChar char="•"/>
               <a:lnSpc>
                 <a:spcPts val="2200"/>
@@ -20158,10 +20578,12 @@
           </a:bodyPr>
           <a:lstStyle/>
           <a:p>
-            <a:pPr>
-              <a:spcAft>
-                <a:spcPts val="1000"/>
-              </a:spcAft>
+            <a:pPr lvl="0" marL="457200" indent="-228600">
+              <a:buFont typeface="Calibri"/>
+              <a:spcAft>
+                <a:spcPts val="1000"/>
+              </a:spcAft>
+              <a:buSzPct val="100000"/>
               <a:buChar char="•"/>
               <a:lnSpc>
                 <a:spcPts val="2200"/>
@@ -20178,10 +20600,12 @@
             </a:r>
           </a:p>
           <a:p>
-            <a:pPr>
-              <a:spcAft>
-                <a:spcPts val="1000"/>
-              </a:spcAft>
+            <a:pPr lvl="0" marL="457200" indent="-228600">
+              <a:buFont typeface="Calibri"/>
+              <a:spcAft>
+                <a:spcPts val="1000"/>
+              </a:spcAft>
+              <a:buSzPct val="100000"/>
               <a:buChar char="•"/>
               <a:lnSpc>
                 <a:spcPts val="2200"/>
@@ -20198,10 +20622,12 @@
             </a:r>
           </a:p>
           <a:p>
-            <a:pPr>
-              <a:spcAft>
-                <a:spcPts val="1000"/>
-              </a:spcAft>
+            <a:pPr lvl="0" marL="457200" indent="-228600">
+              <a:buFont typeface="Calibri"/>
+              <a:spcAft>
+                <a:spcPts val="1000"/>
+              </a:spcAft>
+              <a:buSzPct val="100000"/>
               <a:buChar char="•"/>
               <a:lnSpc>
                 <a:spcPts val="2200"/>
@@ -20337,10 +20763,12 @@
           </a:bodyPr>
           <a:lstStyle/>
           <a:p>
-            <a:pPr>
-              <a:spcAft>
-                <a:spcPts val="1000"/>
-              </a:spcAft>
+            <a:pPr lvl="0" marL="457200" indent="-228600">
+              <a:buFont typeface="Calibri"/>
+              <a:spcAft>
+                <a:spcPts val="1000"/>
+              </a:spcAft>
+              <a:buSzPct val="100000"/>
               <a:buChar char="•"/>
               <a:lnSpc>
                 <a:spcPts val="2200"/>
@@ -20357,10 +20785,12 @@
             </a:r>
           </a:p>
           <a:p>
-            <a:pPr>
-              <a:spcAft>
-                <a:spcPts val="1000"/>
-              </a:spcAft>
+            <a:pPr lvl="0" marL="457200" indent="-228600">
+              <a:buFont typeface="Calibri"/>
+              <a:spcAft>
+                <a:spcPts val="1000"/>
+              </a:spcAft>
+              <a:buSzPct val="100000"/>
               <a:buChar char="•"/>
               <a:lnSpc>
                 <a:spcPts val="2200"/>
@@ -20377,10 +20807,12 @@
             </a:r>
           </a:p>
           <a:p>
-            <a:pPr>
-              <a:spcAft>
-                <a:spcPts val="1000"/>
-              </a:spcAft>
+            <a:pPr lvl="0" marL="457200" indent="-228600">
+              <a:buFont typeface="Calibri"/>
+              <a:spcAft>
+                <a:spcPts val="1000"/>
+              </a:spcAft>
+              <a:buSzPct val="100000"/>
               <a:buChar char="•"/>
               <a:lnSpc>
                 <a:spcPts val="2200"/>
@@ -20397,10 +20829,12 @@
             </a:r>
           </a:p>
           <a:p>
-            <a:pPr>
-              <a:spcAft>
-                <a:spcPts val="1000"/>
-              </a:spcAft>
+            <a:pPr lvl="0" marL="457200" indent="-228600">
+              <a:buFont typeface="Calibri"/>
+              <a:spcAft>
+                <a:spcPts val="1000"/>
+              </a:spcAft>
+              <a:buSzPct val="100000"/>
               <a:buChar char="•"/>
               <a:lnSpc>
                 <a:spcPts val="2200"/>
@@ -20417,10 +20851,12 @@
             </a:r>
           </a:p>
           <a:p>
-            <a:pPr>
-              <a:spcAft>
-                <a:spcPts val="1000"/>
-              </a:spcAft>
+            <a:pPr lvl="0" marL="457200" indent="-228600">
+              <a:buFont typeface="Calibri"/>
+              <a:spcAft>
+                <a:spcPts val="1000"/>
+              </a:spcAft>
+              <a:buSzPct val="100000"/>
               <a:buChar char="•"/>
               <a:lnSpc>
                 <a:spcPts val="2200"/>
@@ -20437,10 +20873,12 @@
             </a:r>
           </a:p>
           <a:p>
-            <a:pPr>
-              <a:spcAft>
-                <a:spcPts val="1000"/>
-              </a:spcAft>
+            <a:pPr lvl="0" marL="457200" indent="-228600">
+              <a:buFont typeface="Calibri"/>
+              <a:spcAft>
+                <a:spcPts val="1000"/>
+              </a:spcAft>
+              <a:buSzPct val="100000"/>
               <a:buChar char="•"/>
               <a:lnSpc>
                 <a:spcPts val="2200"/>
@@ -20576,10 +21014,12 @@
           </a:bodyPr>
           <a:lstStyle/>
           <a:p>
-            <a:pPr>
-              <a:spcAft>
-                <a:spcPts val="1000"/>
-              </a:spcAft>
+            <a:pPr lvl="0" marL="457200" indent="-228600">
+              <a:buFont typeface="Calibri"/>
+              <a:spcAft>
+                <a:spcPts val="1000"/>
+              </a:spcAft>
+              <a:buSzPct val="100000"/>
               <a:buChar char="•"/>
               <a:lnSpc>
                 <a:spcPts val="2200"/>
@@ -20596,10 +21036,12 @@
             </a:r>
           </a:p>
           <a:p>
-            <a:pPr>
-              <a:spcAft>
-                <a:spcPts val="1000"/>
-              </a:spcAft>
+            <a:pPr lvl="0" marL="457200" indent="-228600">
+              <a:buFont typeface="Calibri"/>
+              <a:spcAft>
+                <a:spcPts val="1000"/>
+              </a:spcAft>
+              <a:buSzPct val="100000"/>
               <a:buChar char="•"/>
               <a:lnSpc>
                 <a:spcPts val="2200"/>
@@ -20616,10 +21058,12 @@
             </a:r>
           </a:p>
           <a:p>
-            <a:pPr>
-              <a:spcAft>
-                <a:spcPts val="1000"/>
-              </a:spcAft>
+            <a:pPr lvl="0" marL="457200" indent="-228600">
+              <a:buFont typeface="Calibri"/>
+              <a:spcAft>
+                <a:spcPts val="1000"/>
+              </a:spcAft>
+              <a:buSzPct val="100000"/>
               <a:buChar char="•"/>
               <a:lnSpc>
                 <a:spcPts val="2200"/>
@@ -20636,10 +21080,12 @@
             </a:r>
           </a:p>
           <a:p>
-            <a:pPr>
-              <a:spcAft>
-                <a:spcPts val="1000"/>
-              </a:spcAft>
+            <a:pPr lvl="0" marL="457200" indent="-228600">
+              <a:buFont typeface="Calibri"/>
+              <a:spcAft>
+                <a:spcPts val="1000"/>
+              </a:spcAft>
+              <a:buSzPct val="100000"/>
               <a:buChar char="•"/>
               <a:lnSpc>
                 <a:spcPts val="2200"/>
@@ -20656,10 +21102,12 @@
             </a:r>
           </a:p>
           <a:p>
-            <a:pPr>
-              <a:spcAft>
-                <a:spcPts val="1000"/>
-              </a:spcAft>
+            <a:pPr lvl="0" marL="457200" indent="-228600">
+              <a:buFont typeface="Calibri"/>
+              <a:spcAft>
+                <a:spcPts val="1000"/>
+              </a:spcAft>
+              <a:buSzPct val="100000"/>
               <a:buChar char="•"/>
               <a:lnSpc>
                 <a:spcPts val="2200"/>
@@ -20795,10 +21243,12 @@
           </a:bodyPr>
           <a:lstStyle/>
           <a:p>
-            <a:pPr>
-              <a:spcAft>
-                <a:spcPts val="1000"/>
-              </a:spcAft>
+            <a:pPr lvl="0" marL="457200" indent="-228600">
+              <a:buFont typeface="Calibri"/>
+              <a:spcAft>
+                <a:spcPts val="1000"/>
+              </a:spcAft>
+              <a:buSzPct val="100000"/>
               <a:buChar char="•"/>
               <a:lnSpc>
                 <a:spcPts val="2200"/>
@@ -20815,10 +21265,12 @@
             </a:r>
           </a:p>
           <a:p>
-            <a:pPr>
-              <a:spcAft>
-                <a:spcPts val="1000"/>
-              </a:spcAft>
+            <a:pPr lvl="0" marL="457200" indent="-228600">
+              <a:buFont typeface="Calibri"/>
+              <a:spcAft>
+                <a:spcPts val="1000"/>
+              </a:spcAft>
+              <a:buSzPct val="100000"/>
               <a:buChar char="•"/>
               <a:lnSpc>
                 <a:spcPts val="2200"/>
@@ -20835,10 +21287,12 @@
             </a:r>
           </a:p>
           <a:p>
-            <a:pPr>
-              <a:spcAft>
-                <a:spcPts val="1000"/>
-              </a:spcAft>
+            <a:pPr lvl="0" marL="457200" indent="-228600">
+              <a:buFont typeface="Calibri"/>
+              <a:spcAft>
+                <a:spcPts val="1000"/>
+              </a:spcAft>
+              <a:buSzPct val="100000"/>
               <a:buChar char="•"/>
               <a:lnSpc>
                 <a:spcPts val="2200"/>
@@ -20855,10 +21309,12 @@
             </a:r>
           </a:p>
           <a:p>
-            <a:pPr>
-              <a:spcAft>
-                <a:spcPts val="1000"/>
-              </a:spcAft>
+            <a:pPr lvl="0" marL="457200" indent="-228600">
+              <a:buFont typeface="Calibri"/>
+              <a:spcAft>
+                <a:spcPts val="1000"/>
+              </a:spcAft>
+              <a:buSzPct val="100000"/>
               <a:buChar char="•"/>
               <a:lnSpc>
                 <a:spcPts val="2200"/>
@@ -20994,10 +21450,12 @@
           </a:bodyPr>
           <a:lstStyle/>
           <a:p>
-            <a:pPr>
-              <a:spcAft>
-                <a:spcPts val="1000"/>
-              </a:spcAft>
+            <a:pPr lvl="0" marL="457200" indent="-228600">
+              <a:buFont typeface="Calibri"/>
+              <a:spcAft>
+                <a:spcPts val="1000"/>
+              </a:spcAft>
+              <a:buSzPct val="100000"/>
               <a:buChar char="•"/>
               <a:lnSpc>
                 <a:spcPts val="2200"/>
@@ -21014,10 +21472,12 @@
             </a:r>
           </a:p>
           <a:p>
-            <a:pPr>
-              <a:spcAft>
-                <a:spcPts val="1000"/>
-              </a:spcAft>
+            <a:pPr lvl="0" marL="457200" indent="-228600">
+              <a:buFont typeface="Calibri"/>
+              <a:spcAft>
+                <a:spcPts val="1000"/>
+              </a:spcAft>
+              <a:buSzPct val="100000"/>
               <a:buChar char="•"/>
               <a:lnSpc>
                 <a:spcPts val="2200"/>
@@ -21034,10 +21494,12 @@
             </a:r>
           </a:p>
           <a:p>
-            <a:pPr>
-              <a:spcAft>
-                <a:spcPts val="1000"/>
-              </a:spcAft>
+            <a:pPr lvl="0" marL="457200" indent="-228600">
+              <a:buFont typeface="Calibri"/>
+              <a:spcAft>
+                <a:spcPts val="1000"/>
+              </a:spcAft>
+              <a:buSzPct val="100000"/>
               <a:buChar char="•"/>
               <a:lnSpc>
                 <a:spcPts val="2200"/>
@@ -21173,10 +21635,12 @@
           </a:bodyPr>
           <a:lstStyle/>
           <a:p>
-            <a:pPr>
-              <a:spcAft>
-                <a:spcPts val="1000"/>
-              </a:spcAft>
+            <a:pPr lvl="0" marL="457200" indent="-228600">
+              <a:buFont typeface="Calibri"/>
+              <a:spcAft>
+                <a:spcPts val="1000"/>
+              </a:spcAft>
+              <a:buSzPct val="100000"/>
               <a:buChar char="•"/>
               <a:lnSpc>
                 <a:spcPts val="2200"/>
@@ -21193,10 +21657,12 @@
             </a:r>
           </a:p>
           <a:p>
-            <a:pPr>
-              <a:spcAft>
-                <a:spcPts val="1000"/>
-              </a:spcAft>
+            <a:pPr lvl="0" marL="457200" indent="-228600">
+              <a:buFont typeface="Calibri"/>
+              <a:spcAft>
+                <a:spcPts val="1000"/>
+              </a:spcAft>
+              <a:buSzPct val="100000"/>
               <a:buChar char="•"/>
               <a:lnSpc>
                 <a:spcPts val="2200"/>
@@ -21213,10 +21679,12 @@
             </a:r>
           </a:p>
           <a:p>
-            <a:pPr>
-              <a:spcAft>
-                <a:spcPts val="1000"/>
-              </a:spcAft>
+            <a:pPr lvl="0" marL="457200" indent="-228600">
+              <a:buFont typeface="Calibri"/>
+              <a:spcAft>
+                <a:spcPts val="1000"/>
+              </a:spcAft>
+              <a:buSzPct val="100000"/>
               <a:buChar char="•"/>
               <a:lnSpc>
                 <a:spcPts val="2200"/>
@@ -21352,10 +21820,12 @@
           </a:bodyPr>
           <a:lstStyle/>
           <a:p>
-            <a:pPr>
-              <a:spcAft>
-                <a:spcPts val="1000"/>
-              </a:spcAft>
+            <a:pPr lvl="0" marL="457200" indent="-228600">
+              <a:buFont typeface="Calibri"/>
+              <a:spcAft>
+                <a:spcPts val="1000"/>
+              </a:spcAft>
+              <a:buSzPct val="100000"/>
               <a:buChar char="•"/>
               <a:lnSpc>
                 <a:spcPts val="2200"/>
@@ -21372,10 +21842,12 @@
             </a:r>
           </a:p>
           <a:p>
-            <a:pPr>
-              <a:spcAft>
-                <a:spcPts val="1000"/>
-              </a:spcAft>
+            <a:pPr lvl="0" marL="457200" indent="-228600">
+              <a:buFont typeface="Calibri"/>
+              <a:spcAft>
+                <a:spcPts val="1000"/>
+              </a:spcAft>
+              <a:buSzPct val="100000"/>
               <a:buChar char="•"/>
               <a:lnSpc>
                 <a:spcPts val="2200"/>
@@ -21511,10 +21983,12 @@
           </a:bodyPr>
           <a:lstStyle/>
           <a:p>
-            <a:pPr>
-              <a:spcAft>
-                <a:spcPts val="1000"/>
-              </a:spcAft>
+            <a:pPr lvl="0" marL="457200" indent="-228600">
+              <a:buFont typeface="Calibri"/>
+              <a:spcAft>
+                <a:spcPts val="1000"/>
+              </a:spcAft>
+              <a:buSzPct val="100000"/>
               <a:buChar char="•"/>
               <a:lnSpc>
                 <a:spcPts val="2200"/>
@@ -21531,10 +22005,12 @@
             </a:r>
           </a:p>
           <a:p>
-            <a:pPr>
-              <a:spcAft>
-                <a:spcPts val="1000"/>
-              </a:spcAft>
+            <a:pPr lvl="0" marL="457200" indent="-228600">
+              <a:buFont typeface="Calibri"/>
+              <a:spcAft>
+                <a:spcPts val="1000"/>
+              </a:spcAft>
+              <a:buSzPct val="100000"/>
               <a:buChar char="•"/>
               <a:lnSpc>
                 <a:spcPts val="2200"/>
@@ -21670,10 +22146,12 @@
           </a:bodyPr>
           <a:lstStyle/>
           <a:p>
-            <a:pPr>
-              <a:spcAft>
-                <a:spcPts val="1000"/>
-              </a:spcAft>
+            <a:pPr lvl="0" marL="457200" indent="-228600">
+              <a:buFont typeface="Calibri"/>
+              <a:spcAft>
+                <a:spcPts val="1000"/>
+              </a:spcAft>
+              <a:buSzPct val="100000"/>
               <a:buChar char="•"/>
               <a:lnSpc>
                 <a:spcPts val="2200"/>
@@ -21690,10 +22168,12 @@
             </a:r>
           </a:p>
           <a:p>
-            <a:pPr>
-              <a:spcAft>
-                <a:spcPts val="1000"/>
-              </a:spcAft>
+            <a:pPr lvl="0" marL="457200" indent="-228600">
+              <a:buFont typeface="Calibri"/>
+              <a:spcAft>
+                <a:spcPts val="1000"/>
+              </a:spcAft>
+              <a:buSzPct val="100000"/>
               <a:buChar char="•"/>
               <a:lnSpc>
                 <a:spcPts val="2200"/>
@@ -21710,10 +22190,12 @@
             </a:r>
           </a:p>
           <a:p>
-            <a:pPr>
-              <a:spcAft>
-                <a:spcPts val="1000"/>
-              </a:spcAft>
+            <a:pPr lvl="0" marL="457200" indent="-228600">
+              <a:buFont typeface="Calibri"/>
+              <a:spcAft>
+                <a:spcPts val="1000"/>
+              </a:spcAft>
+              <a:buSzPct val="100000"/>
               <a:buChar char="•"/>
               <a:lnSpc>
                 <a:spcPts val="2200"/>
@@ -21849,10 +22331,12 @@
           </a:bodyPr>
           <a:lstStyle/>
           <a:p>
-            <a:pPr>
-              <a:spcAft>
-                <a:spcPts val="1000"/>
-              </a:spcAft>
+            <a:pPr lvl="0" marL="457200" indent="-228600">
+              <a:buFont typeface="Calibri"/>
+              <a:spcAft>
+                <a:spcPts val="1000"/>
+              </a:spcAft>
+              <a:buSzPct val="100000"/>
               <a:buChar char="•"/>
               <a:lnSpc>
                 <a:spcPts val="2200"/>
@@ -21869,10 +22353,12 @@
             </a:r>
           </a:p>
           <a:p>
-            <a:pPr>
-              <a:spcAft>
-                <a:spcPts val="1000"/>
-              </a:spcAft>
+            <a:pPr lvl="0" marL="457200" indent="-228600">
+              <a:buFont typeface="Calibri"/>
+              <a:spcAft>
+                <a:spcPts val="1000"/>
+              </a:spcAft>
+              <a:buSzPct val="100000"/>
               <a:buChar char="•"/>
               <a:lnSpc>
                 <a:spcPts val="2200"/>
@@ -21889,10 +22375,12 @@
             </a:r>
           </a:p>
           <a:p>
-            <a:pPr>
-              <a:spcAft>
-                <a:spcPts val="1000"/>
-              </a:spcAft>
+            <a:pPr lvl="0" marL="457200" indent="-228600">
+              <a:buFont typeface="Calibri"/>
+              <a:spcAft>
+                <a:spcPts val="1000"/>
+              </a:spcAft>
+              <a:buSzPct val="100000"/>
               <a:buChar char="•"/>
               <a:lnSpc>
                 <a:spcPts val="2200"/>
@@ -21909,10 +22397,12 @@
             </a:r>
           </a:p>
           <a:p>
-            <a:pPr>
-              <a:spcAft>
-                <a:spcPts val="1000"/>
-              </a:spcAft>
+            <a:pPr lvl="0" marL="457200" indent="-228600">
+              <a:buFont typeface="Calibri"/>
+              <a:spcAft>
+                <a:spcPts val="1000"/>
+              </a:spcAft>
+              <a:buSzPct val="100000"/>
               <a:buChar char="•"/>
               <a:lnSpc>
                 <a:spcPts val="2200"/>
@@ -22048,10 +22538,12 @@
           </a:bodyPr>
           <a:lstStyle/>
           <a:p>
-            <a:pPr>
-              <a:spcAft>
-                <a:spcPts val="1000"/>
-              </a:spcAft>
+            <a:pPr lvl="0" marL="457200" indent="-228600">
+              <a:buFont typeface="Calibri"/>
+              <a:spcAft>
+                <a:spcPts val="1000"/>
+              </a:spcAft>
+              <a:buSzPct val="100000"/>
               <a:buChar char="•"/>
               <a:lnSpc>
                 <a:spcPts val="2200"/>
@@ -22068,10 +22560,12 @@
             </a:r>
           </a:p>
           <a:p>
-            <a:pPr>
-              <a:spcAft>
-                <a:spcPts val="1000"/>
-              </a:spcAft>
+            <a:pPr lvl="0" marL="457200" indent="-228600">
+              <a:buFont typeface="Calibri"/>
+              <a:spcAft>
+                <a:spcPts val="1000"/>
+              </a:spcAft>
+              <a:buSzPct val="100000"/>
               <a:buChar char="•"/>
               <a:lnSpc>
                 <a:spcPts val="2200"/>
@@ -22088,10 +22582,12 @@
             </a:r>
           </a:p>
           <a:p>
-            <a:pPr>
-              <a:spcAft>
-                <a:spcPts val="1000"/>
-              </a:spcAft>
+            <a:pPr lvl="0" marL="457200" indent="-228600">
+              <a:buFont typeface="Calibri"/>
+              <a:spcAft>
+                <a:spcPts val="1000"/>
+              </a:spcAft>
+              <a:buSzPct val="100000"/>
               <a:buChar char="•"/>
               <a:lnSpc>
                 <a:spcPts val="2200"/>
@@ -22227,10 +22723,12 @@
           </a:bodyPr>
           <a:lstStyle/>
           <a:p>
-            <a:pPr>
-              <a:spcAft>
-                <a:spcPts val="1000"/>
-              </a:spcAft>
+            <a:pPr lvl="0" marL="457200" indent="-228600">
+              <a:buFont typeface="Calibri"/>
+              <a:spcAft>
+                <a:spcPts val="1000"/>
+              </a:spcAft>
+              <a:buSzPct val="100000"/>
               <a:buChar char="•"/>
               <a:lnSpc>
                 <a:spcPts val="2200"/>
@@ -22247,10 +22745,12 @@
             </a:r>
           </a:p>
           <a:p>
-            <a:pPr>
-              <a:spcAft>
-                <a:spcPts val="1000"/>
-              </a:spcAft>
+            <a:pPr lvl="0" marL="457200" indent="-228600">
+              <a:buFont typeface="Calibri"/>
+              <a:spcAft>
+                <a:spcPts val="1000"/>
+              </a:spcAft>
+              <a:buSzPct val="100000"/>
               <a:buChar char="•"/>
               <a:lnSpc>
                 <a:spcPts val="2200"/>
@@ -22267,10 +22767,12 @@
             </a:r>
           </a:p>
           <a:p>
-            <a:pPr>
-              <a:spcAft>
-                <a:spcPts val="1000"/>
-              </a:spcAft>
+            <a:pPr lvl="0" marL="457200" indent="-228600">
+              <a:buFont typeface="Calibri"/>
+              <a:spcAft>
+                <a:spcPts val="1000"/>
+              </a:spcAft>
+              <a:buSzPct val="100000"/>
               <a:buChar char="•"/>
               <a:lnSpc>
                 <a:spcPts val="2200"/>
@@ -22287,10 +22789,12 @@
             </a:r>
           </a:p>
           <a:p>
-            <a:pPr>
-              <a:spcAft>
-                <a:spcPts val="1000"/>
-              </a:spcAft>
+            <a:pPr lvl="0" marL="457200" indent="-228600">
+              <a:buFont typeface="Calibri"/>
+              <a:spcAft>
+                <a:spcPts val="1000"/>
+              </a:spcAft>
+              <a:buSzPct val="100000"/>
               <a:buChar char="•"/>
               <a:lnSpc>
                 <a:spcPts val="2200"/>
@@ -22426,10 +22930,12 @@
           </a:bodyPr>
           <a:lstStyle/>
           <a:p>
-            <a:pPr>
-              <a:spcAft>
-                <a:spcPts val="1000"/>
-              </a:spcAft>
+            <a:pPr lvl="0" marL="457200" indent="-228600">
+              <a:buFont typeface="Calibri"/>
+              <a:spcAft>
+                <a:spcPts val="1000"/>
+              </a:spcAft>
+              <a:buSzPct val="100000"/>
               <a:buChar char="•"/>
               <a:lnSpc>
                 <a:spcPts val="2200"/>
@@ -22446,10 +22952,12 @@
             </a:r>
           </a:p>
           <a:p>
-            <a:pPr>
-              <a:spcAft>
-                <a:spcPts val="1000"/>
-              </a:spcAft>
+            <a:pPr lvl="0" marL="457200" indent="-228600">
+              <a:buFont typeface="Calibri"/>
+              <a:spcAft>
+                <a:spcPts val="1000"/>
+              </a:spcAft>
+              <a:buSzPct val="100000"/>
               <a:buChar char="•"/>
               <a:lnSpc>
                 <a:spcPts val="2200"/>
@@ -22466,10 +22974,12 @@
             </a:r>
           </a:p>
           <a:p>
-            <a:pPr>
-              <a:spcAft>
-                <a:spcPts val="1000"/>
-              </a:spcAft>
+            <a:pPr lvl="0" marL="457200" indent="-228600">
+              <a:buFont typeface="Calibri"/>
+              <a:spcAft>
+                <a:spcPts val="1000"/>
+              </a:spcAft>
+              <a:buSzPct val="100000"/>
               <a:buChar char="•"/>
               <a:lnSpc>
                 <a:spcPts val="2200"/>
@@ -22486,10 +22996,12 @@
             </a:r>
           </a:p>
           <a:p>
-            <a:pPr>
-              <a:spcAft>
-                <a:spcPts val="1000"/>
-              </a:spcAft>
+            <a:pPr lvl="0" marL="457200" indent="-228600">
+              <a:buFont typeface="Calibri"/>
+              <a:spcAft>
+                <a:spcPts val="1000"/>
+              </a:spcAft>
+              <a:buSzPct val="100000"/>
               <a:buChar char="•"/>
               <a:lnSpc>
                 <a:spcPts val="2200"/>
@@ -22506,10 +23018,12 @@
             </a:r>
           </a:p>
           <a:p>
-            <a:pPr>
-              <a:spcAft>
-                <a:spcPts val="1000"/>
-              </a:spcAft>
+            <a:pPr lvl="0" marL="457200" indent="-228600">
+              <a:buFont typeface="Calibri"/>
+              <a:spcAft>
+                <a:spcPts val="1000"/>
+              </a:spcAft>
+              <a:buSzPct val="100000"/>
               <a:buChar char="•"/>
               <a:lnSpc>
                 <a:spcPts val="2200"/>
@@ -22526,10 +23040,12 @@
             </a:r>
           </a:p>
           <a:p>
-            <a:pPr>
-              <a:spcAft>
-                <a:spcPts val="1000"/>
-              </a:spcAft>
+            <a:pPr lvl="0" marL="457200" indent="-228600">
+              <a:buFont typeface="Calibri"/>
+              <a:spcAft>
+                <a:spcPts val="1000"/>
+              </a:spcAft>
+              <a:buSzPct val="100000"/>
               <a:buChar char="•"/>
               <a:lnSpc>
                 <a:spcPts val="2200"/>
@@ -22665,10 +23181,12 @@
           </a:bodyPr>
           <a:lstStyle/>
           <a:p>
-            <a:pPr>
-              <a:spcAft>
-                <a:spcPts val="1000"/>
-              </a:spcAft>
+            <a:pPr lvl="0" marL="457200" indent="-228600">
+              <a:buFont typeface="Calibri"/>
+              <a:spcAft>
+                <a:spcPts val="1000"/>
+              </a:spcAft>
+              <a:buSzPct val="100000"/>
               <a:buChar char="•"/>
               <a:lnSpc>
                 <a:spcPts val="2200"/>
@@ -22685,10 +23203,12 @@
             </a:r>
           </a:p>
           <a:p>
-            <a:pPr>
-              <a:spcAft>
-                <a:spcPts val="1000"/>
-              </a:spcAft>
+            <a:pPr lvl="0" marL="457200" indent="-228600">
+              <a:buFont typeface="Calibri"/>
+              <a:spcAft>
+                <a:spcPts val="1000"/>
+              </a:spcAft>
+              <a:buSzPct val="100000"/>
               <a:buChar char="•"/>
               <a:lnSpc>
                 <a:spcPts val="2200"/>
@@ -22705,10 +23225,12 @@
             </a:r>
           </a:p>
           <a:p>
-            <a:pPr>
-              <a:spcAft>
-                <a:spcPts val="1000"/>
-              </a:spcAft>
+            <a:pPr lvl="0" marL="457200" indent="-228600">
+              <a:buFont typeface="Calibri"/>
+              <a:spcAft>
+                <a:spcPts val="1000"/>
+              </a:spcAft>
+              <a:buSzPct val="100000"/>
               <a:buChar char="•"/>
               <a:lnSpc>
                 <a:spcPts val="2200"/>
@@ -22725,10 +23247,12 @@
             </a:r>
           </a:p>
           <a:p>
-            <a:pPr>
-              <a:spcAft>
-                <a:spcPts val="1000"/>
-              </a:spcAft>
+            <a:pPr lvl="0" marL="457200" indent="-228600">
+              <a:buFont typeface="Calibri"/>
+              <a:spcAft>
+                <a:spcPts val="1000"/>
+              </a:spcAft>
+              <a:buSzPct val="100000"/>
               <a:buChar char="•"/>
               <a:lnSpc>
                 <a:spcPts val="2200"/>
@@ -22864,10 +23388,12 @@
           </a:bodyPr>
           <a:lstStyle/>
           <a:p>
-            <a:pPr>
-              <a:spcAft>
-                <a:spcPts val="1000"/>
-              </a:spcAft>
+            <a:pPr lvl="0" marL="457200" indent="-228600">
+              <a:buFont typeface="Calibri"/>
+              <a:spcAft>
+                <a:spcPts val="1000"/>
+              </a:spcAft>
+              <a:buSzPct val="100000"/>
               <a:buChar char="•"/>
               <a:lnSpc>
                 <a:spcPts val="2200"/>
@@ -22884,10 +23410,12 @@
             </a:r>
           </a:p>
           <a:p>
-            <a:pPr>
-              <a:spcAft>
-                <a:spcPts val="1000"/>
-              </a:spcAft>
+            <a:pPr lvl="0" marL="457200" indent="-228600">
+              <a:buFont typeface="Calibri"/>
+              <a:spcAft>
+                <a:spcPts val="1000"/>
+              </a:spcAft>
+              <a:buSzPct val="100000"/>
               <a:buChar char="•"/>
               <a:lnSpc>
                 <a:spcPts val="2200"/>
@@ -23023,10 +23551,12 @@
           </a:bodyPr>
           <a:lstStyle/>
           <a:p>
-            <a:pPr>
-              <a:spcAft>
-                <a:spcPts val="1000"/>
-              </a:spcAft>
+            <a:pPr lvl="0" marL="457200" indent="-228600">
+              <a:buFont typeface="Calibri"/>
+              <a:spcAft>
+                <a:spcPts val="1000"/>
+              </a:spcAft>
+              <a:buSzPct val="100000"/>
               <a:buChar char="•"/>
               <a:lnSpc>
                 <a:spcPts val="2200"/>
@@ -23043,10 +23573,12 @@
             </a:r>
           </a:p>
           <a:p>
-            <a:pPr>
-              <a:spcAft>
-                <a:spcPts val="1000"/>
-              </a:spcAft>
+            <a:pPr lvl="0" marL="457200" indent="-228600">
+              <a:buFont typeface="Calibri"/>
+              <a:spcAft>
+                <a:spcPts val="1000"/>
+              </a:spcAft>
+              <a:buSzPct val="100000"/>
               <a:buChar char="•"/>
               <a:lnSpc>
                 <a:spcPts val="2200"/>
@@ -23182,10 +23714,12 @@
           </a:bodyPr>
           <a:lstStyle/>
           <a:p>
-            <a:pPr>
-              <a:spcAft>
-                <a:spcPts val="1000"/>
-              </a:spcAft>
+            <a:pPr lvl="0" marL="457200" indent="-228600">
+              <a:buFont typeface="Calibri"/>
+              <a:spcAft>
+                <a:spcPts val="1000"/>
+              </a:spcAft>
+              <a:buSzPct val="100000"/>
               <a:buChar char="•"/>
               <a:lnSpc>
                 <a:spcPts val="2200"/>
@@ -23202,10 +23736,12 @@
             </a:r>
           </a:p>
           <a:p>
-            <a:pPr>
-              <a:spcAft>
-                <a:spcPts val="1000"/>
-              </a:spcAft>
+            <a:pPr lvl="0" marL="457200" indent="-228600">
+              <a:buFont typeface="Calibri"/>
+              <a:spcAft>
+                <a:spcPts val="1000"/>
+              </a:spcAft>
+              <a:buSzPct val="100000"/>
               <a:buChar char="•"/>
               <a:lnSpc>
                 <a:spcPts val="2200"/>
@@ -23222,10 +23758,12 @@
             </a:r>
           </a:p>
           <a:p>
-            <a:pPr>
-              <a:spcAft>
-                <a:spcPts val="1000"/>
-              </a:spcAft>
+            <a:pPr lvl="0" marL="457200" indent="-228600">
+              <a:buFont typeface="Calibri"/>
+              <a:spcAft>
+                <a:spcPts val="1000"/>
+              </a:spcAft>
+              <a:buSzPct val="100000"/>
               <a:buChar char="•"/>
               <a:lnSpc>
                 <a:spcPts val="2200"/>
@@ -23242,10 +23780,12 @@
             </a:r>
           </a:p>
           <a:p>
-            <a:pPr>
-              <a:spcAft>
-                <a:spcPts val="1000"/>
-              </a:spcAft>
+            <a:pPr lvl="0" marL="457200" indent="-228600">
+              <a:buFont typeface="Calibri"/>
+              <a:spcAft>
+                <a:spcPts val="1000"/>
+              </a:spcAft>
+              <a:buSzPct val="100000"/>
               <a:buChar char="•"/>
               <a:lnSpc>
                 <a:spcPts val="2200"/>
@@ -23381,10 +23921,12 @@
           </a:bodyPr>
           <a:lstStyle/>
           <a:p>
-            <a:pPr>
-              <a:spcAft>
-                <a:spcPts val="1000"/>
-              </a:spcAft>
+            <a:pPr lvl="0" marL="457200" indent="-228600">
+              <a:buFont typeface="Calibri"/>
+              <a:spcAft>
+                <a:spcPts val="1000"/>
+              </a:spcAft>
+              <a:buSzPct val="100000"/>
               <a:buChar char="•"/>
               <a:lnSpc>
                 <a:spcPts val="2200"/>
@@ -23401,10 +23943,12 @@
             </a:r>
           </a:p>
           <a:p>
-            <a:pPr>
-              <a:spcAft>
-                <a:spcPts val="1000"/>
-              </a:spcAft>
+            <a:pPr lvl="0" marL="457200" indent="-228600">
+              <a:buFont typeface="Calibri"/>
+              <a:spcAft>
+                <a:spcPts val="1000"/>
+              </a:spcAft>
+              <a:buSzPct val="100000"/>
               <a:buChar char="•"/>
               <a:lnSpc>
                 <a:spcPts val="2200"/>
@@ -23540,10 +24084,12 @@
           </a:bodyPr>
           <a:lstStyle/>
           <a:p>
-            <a:pPr>
-              <a:spcAft>
-                <a:spcPts val="1000"/>
-              </a:spcAft>
+            <a:pPr lvl="0" marL="457200" indent="-228600">
+              <a:buFont typeface="Calibri"/>
+              <a:spcAft>
+                <a:spcPts val="1000"/>
+              </a:spcAft>
+              <a:buSzPct val="100000"/>
               <a:buChar char="•"/>
               <a:lnSpc>
                 <a:spcPts val="2200"/>
@@ -23560,10 +24106,12 @@
             </a:r>
           </a:p>
           <a:p>
-            <a:pPr>
-              <a:spcAft>
-                <a:spcPts val="1000"/>
-              </a:spcAft>
+            <a:pPr lvl="0" marL="457200" indent="-228600">
+              <a:buFont typeface="Calibri"/>
+              <a:spcAft>
+                <a:spcPts val="1000"/>
+              </a:spcAft>
+              <a:buSzPct val="100000"/>
               <a:buChar char="•"/>
               <a:lnSpc>
                 <a:spcPts val="2200"/>
@@ -23580,10 +24128,12 @@
             </a:r>
           </a:p>
           <a:p>
-            <a:pPr>
-              <a:spcAft>
-                <a:spcPts val="1000"/>
-              </a:spcAft>
+            <a:pPr lvl="0" marL="457200" indent="-228600">
+              <a:buFont typeface="Calibri"/>
+              <a:spcAft>
+                <a:spcPts val="1000"/>
+              </a:spcAft>
+              <a:buSzPct val="100000"/>
               <a:buChar char="•"/>
               <a:lnSpc>
                 <a:spcPts val="2200"/>
@@ -23719,10 +24269,12 @@
           </a:bodyPr>
           <a:lstStyle/>
           <a:p>
-            <a:pPr>
-              <a:spcAft>
-                <a:spcPts val="1000"/>
-              </a:spcAft>
+            <a:pPr lvl="0" marL="457200" indent="-228600">
+              <a:buFont typeface="Calibri"/>
+              <a:spcAft>
+                <a:spcPts val="1000"/>
+              </a:spcAft>
+              <a:buSzPct val="100000"/>
               <a:buChar char="•"/>
               <a:lnSpc>
                 <a:spcPts val="2200"/>
@@ -23739,10 +24291,12 @@
             </a:r>
           </a:p>
           <a:p>
-            <a:pPr>
-              <a:spcAft>
-                <a:spcPts val="1000"/>
-              </a:spcAft>
+            <a:pPr lvl="0" marL="457200" indent="-228600">
+              <a:buFont typeface="Calibri"/>
+              <a:spcAft>
+                <a:spcPts val="1000"/>
+              </a:spcAft>
+              <a:buSzPct val="100000"/>
               <a:buChar char="•"/>
               <a:lnSpc>
                 <a:spcPts val="2200"/>
@@ -23759,10 +24313,12 @@
             </a:r>
           </a:p>
           <a:p>
-            <a:pPr>
-              <a:spcAft>
-                <a:spcPts val="1000"/>
-              </a:spcAft>
+            <a:pPr lvl="0" marL="457200" indent="-228600">
+              <a:buFont typeface="Calibri"/>
+              <a:spcAft>
+                <a:spcPts val="1000"/>
+              </a:spcAft>
+              <a:buSzPct val="100000"/>
               <a:buChar char="•"/>
               <a:lnSpc>
                 <a:spcPts val="2200"/>
@@ -23898,10 +24454,12 @@
           </a:bodyPr>
           <a:lstStyle/>
           <a:p>
-            <a:pPr>
-              <a:spcAft>
-                <a:spcPts val="1000"/>
-              </a:spcAft>
+            <a:pPr lvl="0" marL="457200" indent="-228600">
+              <a:buFont typeface="Calibri"/>
+              <a:spcAft>
+                <a:spcPts val="1000"/>
+              </a:spcAft>
+              <a:buSzPct val="100000"/>
               <a:buChar char="•"/>
               <a:lnSpc>
                 <a:spcPts val="2200"/>
@@ -23918,10 +24476,12 @@
             </a:r>
           </a:p>
           <a:p>
-            <a:pPr>
-              <a:spcAft>
-                <a:spcPts val="1000"/>
-              </a:spcAft>
+            <a:pPr lvl="0" marL="457200" indent="-228600">
+              <a:buFont typeface="Calibri"/>
+              <a:spcAft>
+                <a:spcPts val="1000"/>
+              </a:spcAft>
+              <a:buSzPct val="100000"/>
               <a:buChar char="•"/>
               <a:lnSpc>
                 <a:spcPts val="2200"/>
@@ -23938,10 +24498,12 @@
             </a:r>
           </a:p>
           <a:p>
-            <a:pPr>
-              <a:spcAft>
-                <a:spcPts val="1000"/>
-              </a:spcAft>
+            <a:pPr lvl="0" marL="457200" indent="-228600">
+              <a:buFont typeface="Calibri"/>
+              <a:spcAft>
+                <a:spcPts val="1000"/>
+              </a:spcAft>
+              <a:buSzPct val="100000"/>
               <a:buChar char="•"/>
               <a:lnSpc>
                 <a:spcPts val="2200"/>
@@ -24077,10 +24639,12 @@
           </a:bodyPr>
           <a:lstStyle/>
           <a:p>
-            <a:pPr>
-              <a:spcAft>
-                <a:spcPts val="1000"/>
-              </a:spcAft>
+            <a:pPr lvl="0" marL="457200" indent="-228600">
+              <a:buFont typeface="Calibri"/>
+              <a:spcAft>
+                <a:spcPts val="1000"/>
+              </a:spcAft>
+              <a:buSzPct val="100000"/>
               <a:buChar char="•"/>
               <a:lnSpc>
                 <a:spcPts val="2200"/>
@@ -24097,10 +24661,12 @@
             </a:r>
           </a:p>
           <a:p>
-            <a:pPr>
-              <a:spcAft>
-                <a:spcPts val="1000"/>
-              </a:spcAft>
+            <a:pPr lvl="0" marL="457200" indent="-228600">
+              <a:buFont typeface="Calibri"/>
+              <a:spcAft>
+                <a:spcPts val="1000"/>
+              </a:spcAft>
+              <a:buSzPct val="100000"/>
               <a:buChar char="•"/>
               <a:lnSpc>
                 <a:spcPts val="2200"/>
@@ -24236,10 +24802,12 @@
           </a:bodyPr>
           <a:lstStyle/>
           <a:p>
-            <a:pPr>
-              <a:spcAft>
-                <a:spcPts val="1000"/>
-              </a:spcAft>
+            <a:pPr lvl="0" marL="457200" indent="-228600">
+              <a:buFont typeface="Calibri"/>
+              <a:spcAft>
+                <a:spcPts val="1000"/>
+              </a:spcAft>
+              <a:buSzPct val="100000"/>
               <a:buChar char="•"/>
               <a:lnSpc>
                 <a:spcPts val="2200"/>
@@ -24256,10 +24824,12 @@
             </a:r>
           </a:p>
           <a:p>
-            <a:pPr>
-              <a:spcAft>
-                <a:spcPts val="1000"/>
-              </a:spcAft>
+            <a:pPr lvl="0" marL="457200" indent="-228600">
+              <a:buFont typeface="Calibri"/>
+              <a:spcAft>
+                <a:spcPts val="1000"/>
+              </a:spcAft>
+              <a:buSzPct val="100000"/>
               <a:buChar char="•"/>
               <a:lnSpc>
                 <a:spcPts val="2200"/>
@@ -24395,10 +24965,12 @@
           </a:bodyPr>
           <a:lstStyle/>
           <a:p>
-            <a:pPr>
-              <a:spcAft>
-                <a:spcPts val="1000"/>
-              </a:spcAft>
+            <a:pPr lvl="0" marL="457200" indent="-228600">
+              <a:buFont typeface="Calibri"/>
+              <a:spcAft>
+                <a:spcPts val="1000"/>
+              </a:spcAft>
+              <a:buSzPct val="100000"/>
               <a:buChar char="•"/>
               <a:lnSpc>
                 <a:spcPts val="2200"/>
@@ -24415,10 +24987,12 @@
             </a:r>
           </a:p>
           <a:p>
-            <a:pPr>
-              <a:spcAft>
-                <a:spcPts val="1000"/>
-              </a:spcAft>
+            <a:pPr lvl="0" marL="457200" indent="-228600">
+              <a:buFont typeface="Calibri"/>
+              <a:spcAft>
+                <a:spcPts val="1000"/>
+              </a:spcAft>
+              <a:buSzPct val="100000"/>
               <a:buChar char="•"/>
               <a:lnSpc>
                 <a:spcPts val="2200"/>
@@ -24435,10 +25009,12 @@
             </a:r>
           </a:p>
           <a:p>
-            <a:pPr>
-              <a:spcAft>
-                <a:spcPts val="1000"/>
-              </a:spcAft>
+            <a:pPr lvl="0" marL="457200" indent="-228600">
+              <a:buFont typeface="Calibri"/>
+              <a:spcAft>
+                <a:spcPts val="1000"/>
+              </a:spcAft>
+              <a:buSzPct val="100000"/>
               <a:buChar char="•"/>
               <a:lnSpc>
                 <a:spcPts val="2200"/>
@@ -24455,10 +25031,12 @@
             </a:r>
           </a:p>
           <a:p>
-            <a:pPr>
-              <a:spcAft>
-                <a:spcPts val="1000"/>
-              </a:spcAft>
+            <a:pPr lvl="0" marL="457200" indent="-228600">
+              <a:buFont typeface="Calibri"/>
+              <a:spcAft>
+                <a:spcPts val="1000"/>
+              </a:spcAft>
+              <a:buSzPct val="100000"/>
               <a:buChar char="•"/>
               <a:lnSpc>
                 <a:spcPts val="2200"/>
@@ -24475,10 +25053,12 @@
             </a:r>
           </a:p>
           <a:p>
-            <a:pPr>
-              <a:spcAft>
-                <a:spcPts val="1000"/>
-              </a:spcAft>
+            <a:pPr lvl="0" marL="457200" indent="-228600">
+              <a:buFont typeface="Calibri"/>
+              <a:spcAft>
+                <a:spcPts val="1000"/>
+              </a:spcAft>
+              <a:buSzPct val="100000"/>
               <a:buChar char="•"/>
               <a:lnSpc>
                 <a:spcPts val="2200"/>
@@ -24614,10 +25194,12 @@
           </a:bodyPr>
           <a:lstStyle/>
           <a:p>
-            <a:pPr>
-              <a:spcAft>
-                <a:spcPts val="1000"/>
-              </a:spcAft>
+            <a:pPr lvl="0" marL="457200" indent="-228600">
+              <a:buFont typeface="Calibri"/>
+              <a:spcAft>
+                <a:spcPts val="1000"/>
+              </a:spcAft>
+              <a:buSzPct val="100000"/>
               <a:buChar char="•"/>
               <a:lnSpc>
                 <a:spcPts val="2200"/>
@@ -24634,10 +25216,12 @@
             </a:r>
           </a:p>
           <a:p>
-            <a:pPr>
-              <a:spcAft>
-                <a:spcPts val="1000"/>
-              </a:spcAft>
+            <a:pPr lvl="0" marL="457200" indent="-228600">
+              <a:buFont typeface="Calibri"/>
+              <a:spcAft>
+                <a:spcPts val="1000"/>
+              </a:spcAft>
+              <a:buSzPct val="100000"/>
               <a:buChar char="•"/>
               <a:lnSpc>
                 <a:spcPts val="2200"/>
@@ -24654,10 +25238,12 @@
             </a:r>
           </a:p>
           <a:p>
-            <a:pPr>
-              <a:spcAft>
-                <a:spcPts val="1000"/>
-              </a:spcAft>
+            <a:pPr lvl="0" marL="457200" indent="-228600">
+              <a:buFont typeface="Calibri"/>
+              <a:spcAft>
+                <a:spcPts val="1000"/>
+              </a:spcAft>
+              <a:buSzPct val="100000"/>
               <a:buChar char="•"/>
               <a:lnSpc>
                 <a:spcPts val="2200"/>
@@ -24793,10 +25379,12 @@
           </a:bodyPr>
           <a:lstStyle/>
           <a:p>
-            <a:pPr>
-              <a:spcAft>
-                <a:spcPts val="1000"/>
-              </a:spcAft>
+            <a:pPr lvl="0" marL="457200" indent="-228600">
+              <a:buFont typeface="Calibri"/>
+              <a:spcAft>
+                <a:spcPts val="1000"/>
+              </a:spcAft>
+              <a:buSzPct val="100000"/>
               <a:buChar char="•"/>
               <a:lnSpc>
                 <a:spcPts val="2200"/>
@@ -24813,10 +25401,12 @@
             </a:r>
           </a:p>
           <a:p>
-            <a:pPr>
-              <a:spcAft>
-                <a:spcPts val="1000"/>
-              </a:spcAft>
+            <a:pPr lvl="0" marL="457200" indent="-228600">
+              <a:buFont typeface="Calibri"/>
+              <a:spcAft>
+                <a:spcPts val="1000"/>
+              </a:spcAft>
+              <a:buSzPct val="100000"/>
               <a:buChar char="•"/>
               <a:lnSpc>
                 <a:spcPts val="2200"/>
@@ -24833,10 +25423,12 @@
             </a:r>
           </a:p>
           <a:p>
-            <a:pPr>
-              <a:spcAft>
-                <a:spcPts val="1000"/>
-              </a:spcAft>
+            <a:pPr lvl="0" marL="457200" indent="-228600">
+              <a:buFont typeface="Calibri"/>
+              <a:spcAft>
+                <a:spcPts val="1000"/>
+              </a:spcAft>
+              <a:buSzPct val="100000"/>
               <a:buChar char="•"/>
               <a:lnSpc>
                 <a:spcPts val="2200"/>
@@ -24972,10 +25564,12 @@
           </a:bodyPr>
           <a:lstStyle/>
           <a:p>
-            <a:pPr>
-              <a:spcAft>
-                <a:spcPts val="1000"/>
-              </a:spcAft>
+            <a:pPr lvl="0" marL="457200" indent="-228600">
+              <a:buFont typeface="Calibri"/>
+              <a:spcAft>
+                <a:spcPts val="1000"/>
+              </a:spcAft>
+              <a:buSzPct val="100000"/>
               <a:buChar char="•"/>
               <a:lnSpc>
                 <a:spcPts val="2200"/>
@@ -24992,10 +25586,12 @@
             </a:r>
           </a:p>
           <a:p>
-            <a:pPr>
-              <a:spcAft>
-                <a:spcPts val="1000"/>
-              </a:spcAft>
+            <a:pPr lvl="0" marL="457200" indent="-228600">
+              <a:buFont typeface="Calibri"/>
+              <a:spcAft>
+                <a:spcPts val="1000"/>
+              </a:spcAft>
+              <a:buSzPct val="100000"/>
               <a:buChar char="•"/>
               <a:lnSpc>
                 <a:spcPts val="2200"/>
@@ -25012,10 +25608,12 @@
             </a:r>
           </a:p>
           <a:p>
-            <a:pPr>
-              <a:spcAft>
-                <a:spcPts val="1000"/>
-              </a:spcAft>
+            <a:pPr lvl="0" marL="457200" indent="-228600">
+              <a:buFont typeface="Calibri"/>
+              <a:spcAft>
+                <a:spcPts val="1000"/>
+              </a:spcAft>
+              <a:buSzPct val="100000"/>
               <a:buChar char="•"/>
               <a:lnSpc>
                 <a:spcPts val="2200"/>
@@ -25151,10 +25749,12 @@
           </a:bodyPr>
           <a:lstStyle/>
           <a:p>
-            <a:pPr>
-              <a:spcAft>
-                <a:spcPts val="1000"/>
-              </a:spcAft>
+            <a:pPr lvl="0" marL="457200" indent="-228600">
+              <a:buFont typeface="Calibri"/>
+              <a:spcAft>
+                <a:spcPts val="1000"/>
+              </a:spcAft>
+              <a:buSzPct val="100000"/>
               <a:buChar char="•"/>
               <a:lnSpc>
                 <a:spcPts val="2200"/>
@@ -25171,10 +25771,12 @@
             </a:r>
           </a:p>
           <a:p>
-            <a:pPr>
-              <a:spcAft>
-                <a:spcPts val="1000"/>
-              </a:spcAft>
+            <a:pPr lvl="0" marL="457200" indent="-228600">
+              <a:buFont typeface="Calibri"/>
+              <a:spcAft>
+                <a:spcPts val="1000"/>
+              </a:spcAft>
+              <a:buSzPct val="100000"/>
               <a:buChar char="•"/>
               <a:lnSpc>
                 <a:spcPts val="2200"/>
@@ -25191,10 +25793,12 @@
             </a:r>
           </a:p>
           <a:p>
-            <a:pPr>
-              <a:spcAft>
-                <a:spcPts val="1000"/>
-              </a:spcAft>
+            <a:pPr lvl="0" marL="457200" indent="-228600">
+              <a:buFont typeface="Calibri"/>
+              <a:spcAft>
+                <a:spcPts val="1000"/>
+              </a:spcAft>
+              <a:buSzPct val="100000"/>
               <a:buChar char="•"/>
               <a:lnSpc>
                 <a:spcPts val="2200"/>
@@ -25211,10 +25815,12 @@
             </a:r>
           </a:p>
           <a:p>
-            <a:pPr>
-              <a:spcAft>
-                <a:spcPts val="1000"/>
-              </a:spcAft>
+            <a:pPr lvl="0" marL="457200" indent="-228600">
+              <a:buFont typeface="Calibri"/>
+              <a:spcAft>
+                <a:spcPts val="1000"/>
+              </a:spcAft>
+              <a:buSzPct val="100000"/>
               <a:buChar char="•"/>
               <a:lnSpc>
                 <a:spcPts val="2200"/>
@@ -25350,10 +25956,12 @@
           </a:bodyPr>
           <a:lstStyle/>
           <a:p>
-            <a:pPr>
-              <a:spcAft>
-                <a:spcPts val="1000"/>
-              </a:spcAft>
+            <a:pPr lvl="0" marL="457200" indent="-228600">
+              <a:buFont typeface="Calibri"/>
+              <a:spcAft>
+                <a:spcPts val="1000"/>
+              </a:spcAft>
+              <a:buSzPct val="100000"/>
               <a:buChar char="•"/>
               <a:lnSpc>
                 <a:spcPts val="2200"/>
@@ -25370,10 +25978,12 @@
             </a:r>
           </a:p>
           <a:p>
-            <a:pPr>
-              <a:spcAft>
-                <a:spcPts val="1000"/>
-              </a:spcAft>
+            <a:pPr lvl="0" marL="457200" indent="-228600">
+              <a:buFont typeface="Calibri"/>
+              <a:spcAft>
+                <a:spcPts val="1000"/>
+              </a:spcAft>
+              <a:buSzPct val="100000"/>
               <a:buChar char="•"/>
               <a:lnSpc>
                 <a:spcPts val="2200"/>
@@ -25390,10 +26000,12 @@
             </a:r>
           </a:p>
           <a:p>
-            <a:pPr>
-              <a:spcAft>
-                <a:spcPts val="1000"/>
-              </a:spcAft>
+            <a:pPr lvl="0" marL="457200" indent="-228600">
+              <a:buFont typeface="Calibri"/>
+              <a:spcAft>
+                <a:spcPts val="1000"/>
+              </a:spcAft>
+              <a:buSzPct val="100000"/>
               <a:buChar char="•"/>
               <a:lnSpc>
                 <a:spcPts val="2200"/>
@@ -25529,10 +26141,12 @@
           </a:bodyPr>
           <a:lstStyle/>
           <a:p>
-            <a:pPr>
-              <a:spcAft>
-                <a:spcPts val="1000"/>
-              </a:spcAft>
+            <a:pPr lvl="0" marL="457200" indent="-228600">
+              <a:buFont typeface="Calibri"/>
+              <a:spcAft>
+                <a:spcPts val="1000"/>
+              </a:spcAft>
+              <a:buSzPct val="100000"/>
               <a:buChar char="•"/>
               <a:lnSpc>
                 <a:spcPts val="2200"/>
@@ -25549,10 +26163,12 @@
             </a:r>
           </a:p>
           <a:p>
-            <a:pPr>
-              <a:spcAft>
-                <a:spcPts val="1000"/>
-              </a:spcAft>
+            <a:pPr lvl="0" marL="457200" indent="-228600">
+              <a:buFont typeface="Calibri"/>
+              <a:spcAft>
+                <a:spcPts val="1000"/>
+              </a:spcAft>
+              <a:buSzPct val="100000"/>
               <a:buChar char="•"/>
               <a:lnSpc>
                 <a:spcPts val="2200"/>
@@ -25688,10 +26304,12 @@
           </a:bodyPr>
           <a:lstStyle/>
           <a:p>
-            <a:pPr>
-              <a:spcAft>
-                <a:spcPts val="1000"/>
-              </a:spcAft>
+            <a:pPr lvl="0" marL="457200" indent="-228600">
+              <a:buFont typeface="Calibri"/>
+              <a:spcAft>
+                <a:spcPts val="1000"/>
+              </a:spcAft>
+              <a:buSzPct val="100000"/>
               <a:buChar char="•"/>
               <a:lnSpc>
                 <a:spcPts val="2200"/>
@@ -25708,10 +26326,12 @@
             </a:r>
           </a:p>
           <a:p>
-            <a:pPr>
-              <a:spcAft>
-                <a:spcPts val="1000"/>
-              </a:spcAft>
+            <a:pPr lvl="0" marL="457200" indent="-228600">
+              <a:buFont typeface="Calibri"/>
+              <a:spcAft>
+                <a:spcPts val="1000"/>
+              </a:spcAft>
+              <a:buSzPct val="100000"/>
               <a:buChar char="•"/>
               <a:lnSpc>
                 <a:spcPts val="2200"/>
@@ -25728,10 +26348,12 @@
             </a:r>
           </a:p>
           <a:p>
-            <a:pPr>
-              <a:spcAft>
-                <a:spcPts val="1000"/>
-              </a:spcAft>
+            <a:pPr lvl="0" marL="457200" indent="-228600">
+              <a:buFont typeface="Calibri"/>
+              <a:spcAft>
+                <a:spcPts val="1000"/>
+              </a:spcAft>
+              <a:buSzPct val="100000"/>
               <a:buChar char="•"/>
               <a:lnSpc>
                 <a:spcPts val="2200"/>
